--- a/10-Knowledge-Products/KP1-GEA/videos/module_1/en/decks/KP1_M1_1.4_Deck_v0.2.pptx
+++ b/10-Knowledge-Products/KP1-GEA/videos/module_1/en/decks/KP1_M1_1.4_Deck_v0.2.pptx
@@ -14,15 +14,15 @@
     <p:handoutMasterId r:id="rId47"/>
   </p:handoutMasterIdLst>
   <p:sldIdLst>
-    <p:sldId id="2681" r:id="rId8"/>
-    <p:sldId id="2715" r:id="rId37"/>
-    <p:sldId id="2716" r:id="rId38"/>
-    <p:sldId id="2717" r:id="rId39"/>
     <p:sldId id="2718" r:id="rId40"/>
     <p:sldId id="2719" r:id="rId41"/>
     <p:sldId id="2720" r:id="rId42"/>
     <p:sldId id="2721" r:id="rId43"/>
     <p:sldId id="2722" r:id="rId44"/>
+    <p:sldId id="2723" r:id="rId45"/>
+    <p:sldId id="2724" r:id="rId17"/>
+    <p:sldId id="2725" r:id="rId16"/>
+    <p:sldId id="2726" r:id="rId15"/>
   </p:sldIdLst>
   <p:sldSz cx="12192000" cy="6858000"/>
   <p:notesSz cx="6858000" cy="9144000"/>
@@ -889,286 +889,6 @@
 </p:notesMaster>
 </file>
 
-<file path=ppt/notesSlides/notesSlide1.xml><?xml version="1.0" encoding="utf-8"?>
-<p:notes xmlns:a="http://schemas.openxmlformats.org/drawingml/2006/main" xmlns:p="http://schemas.openxmlformats.org/presentationml/2006/main" xmlns:r="http://schemas.openxmlformats.org/officeDocument/2006/relationships">
-  <p:cSld>
-    <p:spTree>
-      <p:nvGrpSpPr>
-        <p:cNvPr id="1" name=""/>
-        <p:cNvGrpSpPr/>
-        <p:nvPr/>
-      </p:nvGrpSpPr>
-      <p:grpSpPr>
-        <a:xfrm>
-          <a:off x="0" y="0"/>
-          <a:ext cx="0" cy="0"/>
-          <a:chOff x="0" y="0"/>
-          <a:chExt cx="0" cy="0"/>
-        </a:xfrm>
-      </p:grpSpPr>
-      <p:sp>
-        <p:nvSpPr>
-          <p:cNvPr id="2" name="Slide Image Placeholder 1"/>
-          <p:cNvSpPr>
-            <a:spLocks noGrp="1"/>
-          </p:cNvSpPr>
-          <p:nvPr>
-            <p:ph type="sldImg" idx="2"/>
-          </p:nvPr>
-        </p:nvSpPr>
-        <p:spPr/>
-      </p:sp>
-      <p:sp>
-        <p:nvSpPr>
-          <p:cNvPr id="3" name="Notes Placeholder 2"/>
-          <p:cNvSpPr>
-            <a:spLocks noGrp="1"/>
-          </p:cNvSpPr>
-          <p:nvPr>
-            <p:ph type="body" idx="3" sz="quarter"/>
-          </p:nvPr>
-        </p:nvSpPr>
-        <p:spPr/>
-        <p:txBody>
-          <a:bodyPr/>
-          <a:lstStyle/>
-          <a:p>
-            <a:r>
-              <a:t>VO, slide 1: For a long time, digital transformation in government meant one thing: take a paper process and put it online. The form becomes a web form, the queue an online appointment, the certificate a PDF. The ministry still does the same work — only the medium changes.</a:t>
-            </a:r>
-          </a:p>
-        </p:txBody>
-      </p:sp>
-      <p:sp>
-        <p:nvSpPr>
-          <p:cNvPr id="4" name="Slide Number Placeholder 3"/>
-          <p:cNvSpPr>
-            <a:spLocks noGrp="1"/>
-          </p:cNvSpPr>
-          <p:nvPr>
-            <p:ph type="sldNum" idx="5" sz="quarter"/>
-          </p:nvPr>
-        </p:nvSpPr>
-        <p:spPr/>
-      </p:sp>
-    </p:spTree>
-  </p:cSld>
-  <p:clrMapOvr>
-    <a:masterClrMapping/>
-  </p:clrMapOvr>
-</p:notes>
-</file>
-
-<file path=ppt/notesSlides/notesSlide21.xml><?xml version="1.0" encoding="utf-8"?>
-<p:notes xmlns:a="http://schemas.openxmlformats.org/drawingml/2006/main" xmlns:p="http://schemas.openxmlformats.org/presentationml/2006/main" xmlns:r="http://schemas.openxmlformats.org/officeDocument/2006/relationships">
-  <p:cSld>
-    <p:spTree>
-      <p:nvGrpSpPr>
-        <p:cNvPr id="1" name=""/>
-        <p:cNvGrpSpPr/>
-        <p:nvPr/>
-      </p:nvGrpSpPr>
-      <p:grpSpPr>
-        <a:xfrm>
-          <a:off x="0" y="0"/>
-          <a:ext cx="0" cy="0"/>
-          <a:chOff x="0" y="0"/>
-          <a:chExt cx="0" cy="0"/>
-        </a:xfrm>
-      </p:grpSpPr>
-      <p:sp>
-        <p:nvSpPr>
-          <p:cNvPr id="2" name="Slide Image Placeholder 1"/>
-          <p:cNvSpPr>
-            <a:spLocks noGrp="1"/>
-          </p:cNvSpPr>
-          <p:nvPr>
-            <p:ph type="sldImg" idx="2"/>
-          </p:nvPr>
-        </p:nvSpPr>
-        <p:spPr/>
-      </p:sp>
-      <p:sp>
-        <p:nvSpPr>
-          <p:cNvPr id="3" name="Notes Placeholder 2"/>
-          <p:cNvSpPr>
-            <a:spLocks noGrp="1"/>
-          </p:cNvSpPr>
-          <p:nvPr>
-            <p:ph type="body" idx="3" sz="quarter"/>
-          </p:nvPr>
-        </p:nvSpPr>
-        <p:spPr/>
-        <p:txBody>
-          <a:bodyPr/>
-          <a:lstStyle/>
-          <a:p>
-            <a:r>
-              <a:t>Title card for standalone video 1.4. Content slides are identical to the corresponding section of the combined deck KP1_M1_Deck_v0.2.pptx; voice-over is in each slide’s notes.</a:t>
-            </a:r>
-          </a:p>
-        </p:txBody>
-      </p:sp>
-      <p:sp>
-        <p:nvSpPr>
-          <p:cNvPr id="4" name="Slide Number Placeholder 3"/>
-          <p:cNvSpPr>
-            <a:spLocks noGrp="1"/>
-          </p:cNvSpPr>
-          <p:nvPr>
-            <p:ph type="sldNum" idx="5" sz="quarter"/>
-          </p:nvPr>
-        </p:nvSpPr>
-        <p:spPr/>
-      </p:sp>
-    </p:spTree>
-  </p:cSld>
-  <p:clrMapOvr>
-    <a:masterClrMapping/>
-  </p:clrMapOvr>
-</p:notes>
-</file>
-
-<file path=ppt/notesSlides/notesSlide23.xml><?xml version="1.0" encoding="utf-8"?>
-<p:notes xmlns:a="http://schemas.openxmlformats.org/drawingml/2006/main" xmlns:p="http://schemas.openxmlformats.org/presentationml/2006/main" xmlns:r="http://schemas.openxmlformats.org/officeDocument/2006/relationships">
-  <p:cSld>
-    <p:spTree>
-      <p:nvGrpSpPr>
-        <p:cNvPr id="1" name=""/>
-        <p:cNvGrpSpPr/>
-        <p:nvPr/>
-      </p:nvGrpSpPr>
-      <p:grpSpPr>
-        <a:xfrm>
-          <a:off x="0" y="0"/>
-          <a:ext cx="0" cy="0"/>
-          <a:chOff x="0" y="0"/>
-          <a:chExt cx="0" cy="0"/>
-        </a:xfrm>
-      </p:grpSpPr>
-      <p:sp>
-        <p:nvSpPr>
-          <p:cNvPr id="2" name="Slide Image Placeholder 1"/>
-          <p:cNvSpPr>
-            <a:spLocks noGrp="1"/>
-          </p:cNvSpPr>
-          <p:nvPr>
-            <p:ph type="sldImg" idx="2"/>
-          </p:nvPr>
-        </p:nvSpPr>
-        <p:spPr/>
-      </p:sp>
-      <p:sp>
-        <p:nvSpPr>
-          <p:cNvPr id="3" name="Notes Placeholder 2"/>
-          <p:cNvSpPr>
-            <a:spLocks noGrp="1"/>
-          </p:cNvSpPr>
-          <p:nvPr>
-            <p:ph type="body" idx="3" sz="quarter"/>
-          </p:nvPr>
-        </p:nvSpPr>
-        <p:spPr/>
-        <p:txBody>
-          <a:bodyPr/>
-          <a:lstStyle/>
-          <a:p>
-            <a:r>
-              <a:t>VO: That work is still important. But it is no longer the most important work your ministry is being asked to do. The countries — and the ministries — that are delivering real citizen results today are not just digitising forms. They are redesigning how citizens are served.</a:t>
-            </a:r>
-          </a:p>
-        </p:txBody>
-      </p:sp>
-      <p:sp>
-        <p:nvSpPr>
-          <p:cNvPr id="4" name="Slide Number Placeholder 3"/>
-          <p:cNvSpPr>
-            <a:spLocks noGrp="1"/>
-          </p:cNvSpPr>
-          <p:nvPr>
-            <p:ph type="sldNum" idx="5" sz="quarter"/>
-          </p:nvPr>
-        </p:nvSpPr>
-        <p:spPr/>
-      </p:sp>
-    </p:spTree>
-  </p:cSld>
-  <p:clrMapOvr>
-    <a:masterClrMapping/>
-  </p:clrMapOvr>
-</p:notes>
-</file>
-
-<file path=ppt/notesSlides/notesSlide24.xml><?xml version="1.0" encoding="utf-8"?>
-<p:notes xmlns:a="http://schemas.openxmlformats.org/drawingml/2006/main" xmlns:p="http://schemas.openxmlformats.org/presentationml/2006/main" xmlns:r="http://schemas.openxmlformats.org/officeDocument/2006/relationships">
-  <p:cSld>
-    <p:spTree>
-      <p:nvGrpSpPr>
-        <p:cNvPr id="1" name=""/>
-        <p:cNvGrpSpPr/>
-        <p:nvPr/>
-      </p:nvGrpSpPr>
-      <p:grpSpPr>
-        <a:xfrm>
-          <a:off x="0" y="0"/>
-          <a:ext cx="0" cy="0"/>
-          <a:chOff x="0" y="0"/>
-          <a:chExt cx="0" cy="0"/>
-        </a:xfrm>
-      </p:grpSpPr>
-      <p:sp>
-        <p:nvSpPr>
-          <p:cNvPr id="2" name="Slide Image Placeholder 1"/>
-          <p:cNvSpPr>
-            <a:spLocks noGrp="1"/>
-          </p:cNvSpPr>
-          <p:nvPr>
-            <p:ph type="sldImg" idx="2"/>
-          </p:nvPr>
-        </p:nvSpPr>
-        <p:spPr/>
-      </p:sp>
-      <p:sp>
-        <p:nvSpPr>
-          <p:cNvPr id="3" name="Notes Placeholder 2"/>
-          <p:cNvSpPr>
-            <a:spLocks noGrp="1"/>
-          </p:cNvSpPr>
-          <p:nvPr>
-            <p:ph type="body" idx="3" sz="quarter"/>
-          </p:nvPr>
-        </p:nvSpPr>
-        <p:spPr/>
-        <p:txBody>
-          <a:bodyPr/>
-          <a:lstStyle/>
-          <a:p>
-            <a:r>
-              <a:t>VO: Look at what the new work actually looks like. One farmer registry, used by the agriculture ministry, the cooperative bank, the input subsidy programme and the climate-resilience programme — the same farmer, recognised the same way, by all of them. One national identity that lets a citizen prove who they are at any service, without paper. One learner record that follows the child from primary school to university. None of these is 'put it online.' Each of them is a redesign of how the ministry works.</a:t>
-            </a:r>
-          </a:p>
-        </p:txBody>
-      </p:sp>
-      <p:sp>
-        <p:nvSpPr>
-          <p:cNvPr id="4" name="Slide Number Placeholder 3"/>
-          <p:cNvSpPr>
-            <a:spLocks noGrp="1"/>
-          </p:cNvSpPr>
-          <p:nvPr>
-            <p:ph type="sldNum" idx="5" sz="quarter"/>
-          </p:nvPr>
-        </p:nvSpPr>
-        <p:spPr/>
-      </p:sp>
-    </p:spTree>
-  </p:cSld>
-  <p:clrMapOvr>
-    <a:masterClrMapping/>
-  </p:clrMapOvr>
-</p:notes>
-</file>
-
 <file path=ppt/notesSlides/notesSlide25.xml><?xml version="1.0" encoding="utf-8"?>
 <p:notes xmlns:a="http://schemas.openxmlformats.org/drawingml/2006/main" xmlns:p="http://schemas.openxmlformats.org/presentationml/2006/main" xmlns:r="http://schemas.openxmlformats.org/officeDocument/2006/relationships">
   <p:cSld>
@@ -1214,7 +934,7 @@
           <a:lstStyle/>
           <a:p>
             <a:r>
-              <a:t>VO: But the new work comes with a new problem. When you redesign how the ministry works, two groups must decide together. The business side: your minister, your director-general, your head of policy. The IT side: your architects, your engineers. In the old work, they did not need to talk much. Business decided what; IT delivered how. In the new work, they decide together. About the same questions. With the same level of seriousness.</a:t>
+              <a:t>Title card — the cold open. The hosts name the module, the video number, the title and the single message on this slide; no scripted narration. Hold until the opener begins; the opener is narrated on the next slide.</a:t>
             </a:r>
           </a:p>
         </p:txBody>
@@ -1284,13 +1004,7 @@
           <a:lstStyle/>
           <a:p>
             <a:r>
-              <a:t>VO: But they do not share a language. Your minister talks about citizen services and policy goals. Your chief architect talks about systems, APIs and data. They sit in the same meeting and miss each other. The decision does not get made well — or it does not get made at all. And the ministry stays in the old work, even though the new work is what is needed.</a:t>
-            </a:r>
-          </a:p>
-          <a:p/>
-          <a:p>
-            <a:r>
-              <a:t>This is the Strategist's recognition moment — they have lived this meeting.</a:t>
+              <a:t>VO: For a long time, digital transformation in government meant one thing: take a paper process and put it online. The form becomes a web form, the queue an online appointment, the certificate a PDF. The ministry still does the same work — only the medium changes.</a:t>
             </a:r>
           </a:p>
         </p:txBody>
@@ -1360,7 +1074,7 @@
           <a:lstStyle/>
           <a:p>
             <a:r>
-              <a:t>VO: This is the second job an Enterprise Architecture does. It gives both sides a shared language for the new work. The agreed picture — something both sides can point at. Plain words for the basic terms — service, capability, data domain — that mean the same thing to both sides. And a regular forum — the EA Board — where they sit together and decide. With these in place, the conversation about redesigning how the ministry works finally happens. Without them, it does not.</a:t>
+              <a:t>VO: That work is still important. But it is no longer the most important work your ministry is being asked to do. The countries — and the ministries — that are delivering real citizen results today are not just digitising forms. They are redesigning how citizens are served.</a:t>
             </a:r>
           </a:p>
         </p:txBody>
@@ -1430,13 +1144,7 @@
           <a:lstStyle/>
           <a:p>
             <a:r>
-              <a:t>PRACTICE BOX (on-screen only — never read it, never paraphrase it, never point at it). It replaces the narrated handoff: this video ends on the recap and the Sources slide.</a:t>
-            </a:r>
-          </a:p>
-          <a:p/>
-          <a:p>
-            <a:r>
-              <a:t>VO: In the era of digitising paper, an EA was useful. In the era of redesigning how the ministry works, an EA is necessary — because without it, business and IT cannot have the conversation the redesign requires.</a:t>
+              <a:t>VO: Look at what the new work actually looks like. One farmer registry, used by the agriculture ministry, the cooperative bank, the input subsidy programme and the climate-resilience programme — the same farmer, recognised the same way, by all of them. One national identity that lets a citizen prove who they are at any service, without paper. One learner record that follows the child from primary school to university. None of these is 'put it online.' Each of them is a redesign of how the ministry works.</a:t>
             </a:r>
           </a:p>
         </p:txBody>
@@ -1462,6 +1170,298 @@
 </file>
 
 <file path=ppt/notesSlides/notesSlide29.xml><?xml version="1.0" encoding="utf-8"?>
+<p:notes xmlns:a="http://schemas.openxmlformats.org/drawingml/2006/main" xmlns:p="http://schemas.openxmlformats.org/presentationml/2006/main" xmlns:r="http://schemas.openxmlformats.org/officeDocument/2006/relationships">
+  <p:cSld>
+    <p:spTree>
+      <p:nvGrpSpPr>
+        <p:cNvPr id="1" name=""/>
+        <p:cNvGrpSpPr/>
+        <p:nvPr/>
+      </p:nvGrpSpPr>
+      <p:grpSpPr>
+        <a:xfrm>
+          <a:off x="0" y="0"/>
+          <a:ext cx="0" cy="0"/>
+          <a:chOff x="0" y="0"/>
+          <a:chExt cx="0" cy="0"/>
+        </a:xfrm>
+      </p:grpSpPr>
+      <p:sp>
+        <p:nvSpPr>
+          <p:cNvPr id="2" name="Slide Image Placeholder 1"/>
+          <p:cNvSpPr>
+            <a:spLocks noGrp="1"/>
+          </p:cNvSpPr>
+          <p:nvPr>
+            <p:ph type="sldImg" idx="2"/>
+          </p:nvPr>
+        </p:nvSpPr>
+        <p:spPr/>
+      </p:sp>
+      <p:sp>
+        <p:nvSpPr>
+          <p:cNvPr id="3" name="Notes Placeholder 2"/>
+          <p:cNvSpPr>
+            <a:spLocks noGrp="1"/>
+          </p:cNvSpPr>
+          <p:nvPr>
+            <p:ph type="body" idx="3" sz="quarter"/>
+          </p:nvPr>
+        </p:nvSpPr>
+        <p:spPr/>
+        <p:txBody>
+          <a:bodyPr/>
+          <a:lstStyle/>
+          <a:p>
+            <a:r>
+              <a:t>VO: But the new work comes with a new problem. When you redesign how the ministry works, two groups must decide together. The business side: your minister, your director-general, your head of policy. The IT side: your architects, your engineers. In the old work, they did not need to talk much. Business decided what; IT delivered how. In the new work, they decide together. About the same questions. With the same level of seriousness.</a:t>
+            </a:r>
+          </a:p>
+        </p:txBody>
+      </p:sp>
+      <p:sp>
+        <p:nvSpPr>
+          <p:cNvPr id="4" name="Slide Number Placeholder 3"/>
+          <p:cNvSpPr>
+            <a:spLocks noGrp="1"/>
+          </p:cNvSpPr>
+          <p:nvPr>
+            <p:ph type="sldNum" idx="5" sz="quarter"/>
+          </p:nvPr>
+        </p:nvSpPr>
+        <p:spPr/>
+      </p:sp>
+    </p:spTree>
+  </p:cSld>
+  <p:clrMapOvr>
+    <a:masterClrMapping/>
+  </p:clrMapOvr>
+</p:notes>
+</file>
+
+<file path=ppt/notesSlides/notesSlide30.xml><?xml version="1.0" encoding="utf-8"?>
+<p:notes xmlns:a="http://schemas.openxmlformats.org/drawingml/2006/main" xmlns:p="http://schemas.openxmlformats.org/presentationml/2006/main" xmlns:r="http://schemas.openxmlformats.org/officeDocument/2006/relationships">
+  <p:cSld>
+    <p:spTree>
+      <p:nvGrpSpPr>
+        <p:cNvPr id="1" name=""/>
+        <p:cNvGrpSpPr/>
+        <p:nvPr/>
+      </p:nvGrpSpPr>
+      <p:grpSpPr>
+        <a:xfrm>
+          <a:off x="0" y="0"/>
+          <a:ext cx="0" cy="0"/>
+          <a:chOff x="0" y="0"/>
+          <a:chExt cx="0" cy="0"/>
+        </a:xfrm>
+      </p:grpSpPr>
+      <p:sp>
+        <p:nvSpPr>
+          <p:cNvPr id="2" name="Slide Image Placeholder 1"/>
+          <p:cNvSpPr>
+            <a:spLocks noGrp="1"/>
+          </p:cNvSpPr>
+          <p:nvPr>
+            <p:ph type="sldImg" idx="2"/>
+          </p:nvPr>
+        </p:nvSpPr>
+        <p:spPr/>
+      </p:sp>
+      <p:sp>
+        <p:nvSpPr>
+          <p:cNvPr id="3" name="Notes Placeholder 2"/>
+          <p:cNvSpPr>
+            <a:spLocks noGrp="1"/>
+          </p:cNvSpPr>
+          <p:nvPr>
+            <p:ph type="body" idx="3" sz="quarter"/>
+          </p:nvPr>
+        </p:nvSpPr>
+        <p:spPr/>
+        <p:txBody>
+          <a:bodyPr/>
+          <a:lstStyle/>
+          <a:p>
+            <a:r>
+              <a:t>VO: But they do not share a language. Your minister talks about citizen services and policy goals. Your chief architect talks about systems, APIs and data. They sit in the same meeting and miss each other. The decision does not get made well — or it does not get made at all. And the ministry stays in the old work, even though the new work is what is needed.</a:t>
+            </a:r>
+          </a:p>
+          <a:p/>
+          <a:p>
+            <a:r>
+              <a:t>This is the Strategist's recognition moment — they have lived this meeting.</a:t>
+            </a:r>
+          </a:p>
+        </p:txBody>
+      </p:sp>
+      <p:sp>
+        <p:nvSpPr>
+          <p:cNvPr id="4" name="Slide Number Placeholder 3"/>
+          <p:cNvSpPr>
+            <a:spLocks noGrp="1"/>
+          </p:cNvSpPr>
+          <p:nvPr>
+            <p:ph type="sldNum" idx="5" sz="quarter"/>
+          </p:nvPr>
+        </p:nvSpPr>
+        <p:spPr/>
+      </p:sp>
+    </p:spTree>
+  </p:cSld>
+  <p:clrMapOvr>
+    <a:masterClrMapping/>
+  </p:clrMapOvr>
+</p:notes>
+</file>
+
+<file path=ppt/notesSlides/notesSlide31.xml><?xml version="1.0" encoding="utf-8"?>
+<p:notes xmlns:a="http://schemas.openxmlformats.org/drawingml/2006/main" xmlns:p="http://schemas.openxmlformats.org/presentationml/2006/main" xmlns:r="http://schemas.openxmlformats.org/officeDocument/2006/relationships">
+  <p:cSld>
+    <p:spTree>
+      <p:nvGrpSpPr>
+        <p:cNvPr id="1" name=""/>
+        <p:cNvGrpSpPr/>
+        <p:nvPr/>
+      </p:nvGrpSpPr>
+      <p:grpSpPr>
+        <a:xfrm>
+          <a:off x="0" y="0"/>
+          <a:ext cx="0" cy="0"/>
+          <a:chOff x="0" y="0"/>
+          <a:chExt cx="0" cy="0"/>
+        </a:xfrm>
+      </p:grpSpPr>
+      <p:sp>
+        <p:nvSpPr>
+          <p:cNvPr id="2" name="Slide Image Placeholder 1"/>
+          <p:cNvSpPr>
+            <a:spLocks noGrp="1"/>
+          </p:cNvSpPr>
+          <p:nvPr>
+            <p:ph type="sldImg" idx="2"/>
+          </p:nvPr>
+        </p:nvSpPr>
+        <p:spPr/>
+      </p:sp>
+      <p:sp>
+        <p:nvSpPr>
+          <p:cNvPr id="3" name="Notes Placeholder 2"/>
+          <p:cNvSpPr>
+            <a:spLocks noGrp="1"/>
+          </p:cNvSpPr>
+          <p:nvPr>
+            <p:ph type="body" idx="3" sz="quarter"/>
+          </p:nvPr>
+        </p:nvSpPr>
+        <p:spPr/>
+        <p:txBody>
+          <a:bodyPr/>
+          <a:lstStyle/>
+          <a:p>
+            <a:r>
+              <a:t>VO: This is the second job an Enterprise Architecture does. It gives both sides a shared language for the new work. The agreed picture — something both sides can point at. Plain words for the basic terms — service, capability, data domain — that mean the same thing to both sides. And a regular forum — the EA Board — where they sit together and decide. With these in place, the conversation about redesigning how the ministry works finally happens. Without them, it does not.</a:t>
+            </a:r>
+          </a:p>
+        </p:txBody>
+      </p:sp>
+      <p:sp>
+        <p:nvSpPr>
+          <p:cNvPr id="4" name="Slide Number Placeholder 3"/>
+          <p:cNvSpPr>
+            <a:spLocks noGrp="1"/>
+          </p:cNvSpPr>
+          <p:nvPr>
+            <p:ph type="sldNum" idx="5" sz="quarter"/>
+          </p:nvPr>
+        </p:nvSpPr>
+        <p:spPr/>
+      </p:sp>
+    </p:spTree>
+  </p:cSld>
+  <p:clrMapOvr>
+    <a:masterClrMapping/>
+  </p:clrMapOvr>
+</p:notes>
+</file>
+
+<file path=ppt/notesSlides/notesSlide32.xml><?xml version="1.0" encoding="utf-8"?>
+<p:notes xmlns:a="http://schemas.openxmlformats.org/drawingml/2006/main" xmlns:p="http://schemas.openxmlformats.org/presentationml/2006/main" xmlns:r="http://schemas.openxmlformats.org/officeDocument/2006/relationships">
+  <p:cSld>
+    <p:spTree>
+      <p:nvGrpSpPr>
+        <p:cNvPr id="1" name=""/>
+        <p:cNvGrpSpPr/>
+        <p:nvPr/>
+      </p:nvGrpSpPr>
+      <p:grpSpPr>
+        <a:xfrm>
+          <a:off x="0" y="0"/>
+          <a:ext cx="0" cy="0"/>
+          <a:chOff x="0" y="0"/>
+          <a:chExt cx="0" cy="0"/>
+        </a:xfrm>
+      </p:grpSpPr>
+      <p:sp>
+        <p:nvSpPr>
+          <p:cNvPr id="2" name="Slide Image Placeholder 1"/>
+          <p:cNvSpPr>
+            <a:spLocks noGrp="1"/>
+          </p:cNvSpPr>
+          <p:nvPr>
+            <p:ph type="sldImg" idx="2"/>
+          </p:nvPr>
+        </p:nvSpPr>
+        <p:spPr/>
+      </p:sp>
+      <p:sp>
+        <p:nvSpPr>
+          <p:cNvPr id="3" name="Notes Placeholder 2"/>
+          <p:cNvSpPr>
+            <a:spLocks noGrp="1"/>
+          </p:cNvSpPr>
+          <p:nvPr>
+            <p:ph type="body" idx="3" sz="quarter"/>
+          </p:nvPr>
+        </p:nvSpPr>
+        <p:spPr/>
+        <p:txBody>
+          <a:bodyPr/>
+          <a:lstStyle/>
+          <a:p>
+            <a:r>
+              <a:t>PRACTICE BOX (on-screen only — never read it, never paraphrase it, never point at it). It replaces the narrated handoff: this video ends on the recap and the Sources slide.</a:t>
+            </a:r>
+          </a:p>
+          <a:p/>
+          <a:p>
+            <a:r>
+              <a:t>VO: In the era of digitising paper, an EA was useful. In the era of redesigning how the ministry works, an EA is necessary — because without it, business and IT cannot have the conversation the redesign requires.</a:t>
+            </a:r>
+          </a:p>
+        </p:txBody>
+      </p:sp>
+      <p:sp>
+        <p:nvSpPr>
+          <p:cNvPr id="4" name="Slide Number Placeholder 3"/>
+          <p:cNvSpPr>
+            <a:spLocks noGrp="1"/>
+          </p:cNvSpPr>
+          <p:nvPr>
+            <p:ph type="sldNum" idx="5" sz="quarter"/>
+          </p:nvPr>
+        </p:nvSpPr>
+        <p:spPr/>
+      </p:sp>
+    </p:spTree>
+  </p:cSld>
+  <p:clrMapOvr>
+    <a:masterClrMapping/>
+  </p:clrMapOvr>
+</p:notes>
+</file>
+
+<file path=ppt/notesSlides/notesSlide33.xml><?xml version="1.0" encoding="utf-8"?>
 <p:notes xmlns:a="http://schemas.openxmlformats.org/drawingml/2006/main" xmlns:p="http://schemas.openxmlformats.org/presentationml/2006/main" xmlns:r="http://schemas.openxmlformats.org/officeDocument/2006/relationships">
   <p:cSld>
     <p:spTree>
@@ -11667,1895 +11667,6 @@
 </p:sldMaster>
 </file>
 
-<file path=ppt/slides/slide1.xml><?xml version="1.0" encoding="utf-8"?>
-<p:sld xmlns:a="http://schemas.openxmlformats.org/drawingml/2006/main" xmlns:r="http://schemas.openxmlformats.org/officeDocument/2006/relationships" xmlns:p="http://schemas.openxmlformats.org/presentationml/2006/main">
-  <p:cSld>
-    <p:spTree>
-      <p:nvGrpSpPr>
-        <p:cNvPr id="1" name=""/>
-        <p:cNvGrpSpPr/>
-        <p:nvPr/>
-      </p:nvGrpSpPr>
-      <p:grpSpPr>
-        <a:xfrm>
-          <a:off x="0" y="0"/>
-          <a:ext cx="0" cy="0"/>
-          <a:chOff x="0" y="0"/>
-          <a:chExt cx="0" cy="0"/>
-        </a:xfrm>
-      </p:grpSpPr>
-      <p:cxnSp>
-        <p:nvCxnSpPr>
-          <p:cNvPr id="11" name="Straight Connector 10">
-            <a:extLst>
-              <a:ext uri="{FF2B5EF4-FFF2-40B4-BE49-F238E27FC236}">
-                <a16:creationId xmlns:a16="http://schemas.microsoft.com/office/drawing/2014/main" id="{D9AD66F2-F7C0-4D03-9150-D28F17AC561D}"/>
-              </a:ext>
-            </a:extLst>
-          </p:cNvPr>
-          <p:cNvCxnSpPr>
-            <a:cxnSpLocks/>
-          </p:cNvCxnSpPr>
-          <p:nvPr/>
-        </p:nvCxnSpPr>
-        <p:spPr>
-          <a:xfrm>
-            <a:off x="373021" y="2198718"/>
-            <a:ext cx="6843567" cy="0"/>
-          </a:xfrm>
-          <a:prstGeom prst="line">
-            <a:avLst/>
-          </a:prstGeom>
-          <a:ln w="12700">
-            <a:solidFill>
-              <a:srgbClr val="009CD6"/>
-            </a:solidFill>
-          </a:ln>
-        </p:spPr>
-        <p:style>
-          <a:lnRef idx="1">
-            <a:schemeClr val="accent1"/>
-          </a:lnRef>
-          <a:fillRef idx="0">
-            <a:schemeClr val="accent1"/>
-          </a:fillRef>
-          <a:effectRef idx="0">
-            <a:schemeClr val="accent1"/>
-          </a:effectRef>
-          <a:fontRef idx="minor">
-            <a:schemeClr val="tx1"/>
-          </a:fontRef>
-        </p:style>
-      </p:cxnSp>
-      <p:sp>
-        <p:nvSpPr>
-          <p:cNvPr id="12" name="Title 9">
-            <a:extLst>
-              <a:ext uri="{FF2B5EF4-FFF2-40B4-BE49-F238E27FC236}">
-                <a16:creationId xmlns:a16="http://schemas.microsoft.com/office/drawing/2014/main" id="{EEB08032-CE0E-4986-AEDF-A41026C0E8B9}"/>
-              </a:ext>
-            </a:extLst>
-          </p:cNvPr>
-          <p:cNvSpPr txBox="1">
-            <a:spLocks/>
-          </p:cNvSpPr>
-          <p:nvPr/>
-        </p:nvSpPr>
-        <p:spPr>
-          <a:xfrm>
-            <a:off x="237734" y="702833"/>
-            <a:ext cx="6432007" cy="1218817"/>
-          </a:xfrm>
-          <a:prstGeom prst="rect">
-            <a:avLst/>
-          </a:prstGeom>
-        </p:spPr>
-        <p:txBody>
-          <a:bodyPr anchor="b" wrap="square">
-            <a:noAutofit/>
-          </a:bodyPr>
-          <a:lstStyle>
-            <a:lvl1pPr algn="l" defTabSz="914400" rtl="0" eaLnBrk="1" latinLnBrk="0" hangingPunct="1">
-              <a:lnSpc>
-                <a:spcPct val="90000"/>
-              </a:lnSpc>
-              <a:spcBef>
-                <a:spcPct val="0"/>
-              </a:spcBef>
-              <a:buNone/>
-              <a:defRPr sz="4000" kern="1200">
-                <a:solidFill>
-                  <a:schemeClr val="bg1"/>
-                </a:solidFill>
-                <a:latin typeface="Arial" panose="020B0604020202020204" pitchFamily="34" charset="0"/>
-                <a:ea typeface="+mj-ea"/>
-                <a:cs typeface="Arial" panose="020B0604020202020204" pitchFamily="34" charset="0"/>
-              </a:defRPr>
-            </a:lvl1pPr>
-          </a:lstStyle>
-          <a:p>
-            <a:r>
-              <a:rPr sz="2800" b="1" i="0">
-                <a:solidFill>
-                  <a:srgbClr val="1A1A1A"/>
-                </a:solidFill>
-                <a:latin typeface="Arial"/>
-              </a:rPr>
-              <a:t>1.4 — Why an EA matters more now</a:t>
-            </a:r>
-          </a:p>
-        </p:txBody>
-      </p:sp>
-      <p:pic>
-        <p:nvPicPr>
-          <p:cNvPr id="7" name="Picture 6">
-            <a:extLst>
-              <a:ext uri="{FF2B5EF4-FFF2-40B4-BE49-F238E27FC236}">
-                <a16:creationId xmlns:a16="http://schemas.microsoft.com/office/drawing/2014/main" id="{A2066351-C569-4C4C-A096-308777FCDC32}"/>
-              </a:ext>
-            </a:extLst>
-          </p:cNvPr>
-          <p:cNvPicPr>
-            <a:picLocks noChangeAspect="1"/>
-          </p:cNvPicPr>
-          <p:nvPr/>
-        </p:nvPicPr>
-        <p:blipFill>
-          <a:blip r:embed="rId2">
-            <a:extLst>
-              <a:ext uri="{28A0092B-C50C-407E-A947-70E740481C1C}">
-                <a14:useLocalDpi xmlns:a14="http://schemas.microsoft.com/office/drawing/2010/main" val="0"/>
-              </a:ext>
-            </a:extLst>
-          </a:blip>
-          <a:srcRect t="20219" b="14729"/>
-          <a:stretch>
-            <a:fillRect/>
-          </a:stretch>
-        </p:blipFill>
-        <p:spPr>
-          <a:xfrm>
-            <a:off x="0" y="5620871"/>
-            <a:ext cx="1323975" cy="1218816"/>
-          </a:xfrm>
-          <a:prstGeom prst="rect">
-            <a:avLst/>
-          </a:prstGeom>
-        </p:spPr>
-      </p:pic>
-      <p:sp>
-        <p:nvSpPr>
-          <p:cNvPr id="14" name="Title 9">
-            <a:extLst>
-              <a:ext uri="{FF2B5EF4-FFF2-40B4-BE49-F238E27FC236}">
-                <a16:creationId xmlns:a16="http://schemas.microsoft.com/office/drawing/2014/main" id="{B5087B80-3EE4-1881-0130-ED58CA625092}"/>
-              </a:ext>
-            </a:extLst>
-          </p:cNvPr>
-          <p:cNvSpPr txBox="1">
-            <a:spLocks/>
-          </p:cNvSpPr>
-          <p:nvPr/>
-        </p:nvSpPr>
-        <p:spPr>
-          <a:xfrm>
-            <a:off x="284452" y="2475786"/>
-            <a:ext cx="6382893" cy="953213"/>
-          </a:xfrm>
-          <a:prstGeom prst="rect">
-            <a:avLst/>
-          </a:prstGeom>
-        </p:spPr>
-        <p:txBody>
-          <a:bodyPr anchor="t" wrap="square">
-            <a:noAutofit/>
-          </a:bodyPr>
-          <a:lstStyle>
-            <a:lvl1pPr algn="l" defTabSz="914400" rtl="0" eaLnBrk="1" latinLnBrk="0" hangingPunct="1">
-              <a:lnSpc>
-                <a:spcPct val="90000"/>
-              </a:lnSpc>
-              <a:spcBef>
-                <a:spcPct val="0"/>
-              </a:spcBef>
-              <a:buNone/>
-              <a:defRPr sz="4000" kern="1200">
-                <a:solidFill>
-                  <a:schemeClr val="bg1"/>
-                </a:solidFill>
-                <a:latin typeface="Arial" panose="020B0604020202020204" pitchFamily="34" charset="0"/>
-                <a:ea typeface="+mj-ea"/>
-                <a:cs typeface="Arial" panose="020B0604020202020204" pitchFamily="34" charset="0"/>
-              </a:defRPr>
-            </a:lvl1pPr>
-          </a:lstStyle>
-          <a:p>
-            <a:pPr marL="0" marR="0" lvl="0" indent="0" rtl="0">
-              <a:spcBef>
-                <a:spcPts val="600"/>
-              </a:spcBef>
-              <a:spcAft>
-                <a:spcPts val="600"/>
-              </a:spcAft>
-              <a:buNone/>
-            </a:pPr>
-            <a:r>
-              <a:rPr sz="1300" b="1" i="0">
-                <a:solidFill>
-                  <a:srgbClr val="006E96"/>
-                </a:solidFill>
-                <a:latin typeface="Arial"/>
-              </a:rPr>
-              <a:t>KP1 · Government Enterprise Architecture · Module 1 · Video 1.4</a:t>
-            </a:r>
-          </a:p>
-          <a:p>
-            <a:r>
-              <a:rPr sz="1200" b="0" i="1">
-                <a:solidFill>
-                  <a:srgbClr val="595959"/>
-                </a:solidFill>
-                <a:latin typeface="Arial"/>
-              </a:rPr>
-              <a:t>For thirty years, digital work meant putting paper online. That era is ending. The work now is to redesign how your ministry serves citizens — and that work needs business and IT in the same room, using the same words.</a:t>
-            </a:r>
-          </a:p>
-        </p:txBody>
-      </p:sp>
-      <p:sp>
-        <p:nvSpPr>
-          <p:cNvPr id="17" name="Title 9">
-            <a:extLst>
-              <a:ext uri="{FF2B5EF4-FFF2-40B4-BE49-F238E27FC236}">
-                <a16:creationId xmlns:a16="http://schemas.microsoft.com/office/drawing/2014/main" id="{5E8796F7-DD26-D250-5E97-B38B22298E72}"/>
-              </a:ext>
-            </a:extLst>
-          </p:cNvPr>
-          <p:cNvSpPr txBox="1">
-            <a:spLocks/>
-          </p:cNvSpPr>
-          <p:nvPr/>
-        </p:nvSpPr>
-        <p:spPr>
-          <a:xfrm>
-            <a:off x="284452" y="4363897"/>
-            <a:ext cx="6382893" cy="953213"/>
-          </a:xfrm>
-          <a:prstGeom prst="rect">
-            <a:avLst/>
-          </a:prstGeom>
-        </p:spPr>
-        <p:txBody>
-          <a:bodyPr anchor="t" wrap="square">
-            <a:noAutofit/>
-          </a:bodyPr>
-          <a:lstStyle>
-            <a:lvl1pPr algn="l" defTabSz="914400" rtl="0" eaLnBrk="1" latinLnBrk="0" hangingPunct="1">
-              <a:lnSpc>
-                <a:spcPct val="90000"/>
-              </a:lnSpc>
-              <a:spcBef>
-                <a:spcPct val="0"/>
-              </a:spcBef>
-              <a:buNone/>
-              <a:defRPr sz="4000" kern="1200">
-                <a:solidFill>
-                  <a:schemeClr val="bg1"/>
-                </a:solidFill>
-                <a:latin typeface="Arial" panose="020B0604020202020204" pitchFamily="34" charset="0"/>
-                <a:ea typeface="+mj-ea"/>
-                <a:cs typeface="Arial" panose="020B0604020202020204" pitchFamily="34" charset="0"/>
-              </a:defRPr>
-            </a:lvl1pPr>
-          </a:lstStyle>
-          <a:p>
-            <a:pPr marL="0" marR="0" lvl="0" indent="0" rtl="0">
-              <a:spcBef>
-                <a:spcPts val="600"/>
-              </a:spcBef>
-              <a:spcAft>
-                <a:spcPts val="400"/>
-              </a:spcAft>
-              <a:buNone/>
-            </a:pPr>
-            <a:r>
-              <a:rPr sz="1400" b="1" i="0">
-                <a:solidFill>
-                  <a:srgbClr val="1A1A1A"/>
-                </a:solidFill>
-                <a:latin typeface="Arial"/>
-              </a:rPr>
-              <a:t>Target audience: </a:t>
-            </a:r>
-            <a:r>
-              <a:rPr sz="1400" b="0" i="0">
-                <a:solidFill>
-                  <a:srgbClr val="1A1A1A"/>
-                </a:solidFill>
-                <a:latin typeface="Arial"/>
-              </a:rPr>
-              <a:t>CDO · Director-General · sector minister</a:t>
-            </a:r>
-          </a:p>
-        </p:txBody>
-      </p:sp>
-      <p:sp>
-        <p:nvSpPr>
-          <p:cNvPr id="18" name="Rectangle 17"/>
-          <p:cNvSpPr/>
-          <p:nvPr/>
-        </p:nvSpPr>
-        <p:spPr>
-          <a:xfrm>
-            <a:off x="7022592" y="0"/>
-            <a:ext cx="5169103" cy="6858000"/>
-          </a:xfrm>
-          <a:prstGeom prst="rect">
-            <a:avLst/>
-          </a:prstGeom>
-          <a:solidFill>
-            <a:srgbClr val="009CD6"/>
-          </a:solidFill>
-          <a:ln>
-            <a:noFill/>
-          </a:ln>
-          <a:effectLst/>
-        </p:spPr>
-        <p:style>
-          <a:lnRef idx="1">
-            <a:schemeClr val="accent1"/>
-          </a:lnRef>
-          <a:fillRef idx="3">
-            <a:schemeClr val="accent1"/>
-          </a:fillRef>
-          <a:effectRef idx="2">
-            <a:schemeClr val="accent1"/>
-          </a:effectRef>
-          <a:fontRef idx="minor">
-            <a:schemeClr val="lt1"/>
-          </a:fontRef>
-        </p:style>
-        <p:txBody>
-          <a:bodyPr rtlCol="0" anchor="ctr"/>
-          <a:lstStyle/>
-          <a:p>
-            <a:pPr algn="ctr"/>
-          </a:p>
-        </p:txBody>
-      </p:sp>
-      <p:sp>
-        <p:nvSpPr>
-          <p:cNvPr id="19" name="TextBox 18"/>
-          <p:cNvSpPr txBox="1"/>
-          <p:nvPr/>
-        </p:nvSpPr>
-        <p:spPr>
-          <a:xfrm>
-            <a:off x="7452360" y="457200"/>
-            <a:ext cx="4297680" cy="457200"/>
-          </a:xfrm>
-          <a:prstGeom prst="rect">
-            <a:avLst/>
-          </a:prstGeom>
-          <a:noFill/>
-        </p:spPr>
-        <p:txBody>
-          <a:bodyPr wrap="square">
-            <a:spAutoFit/>
-          </a:bodyPr>
-          <a:lstStyle/>
-          <a:p>
-            <a:r>
-              <a:rPr sz="1100" b="1" i="0">
-                <a:solidFill>
-                  <a:srgbClr val="E5F5FB"/>
-                </a:solidFill>
-                <a:latin typeface="Arial"/>
-              </a:rPr>
-              <a:t>THE LIFECYCLE THIS MODULE TEACHES</a:t>
-            </a:r>
-          </a:p>
-        </p:txBody>
-      </p:sp>
-      <p:sp>
-        <p:nvSpPr>
-          <p:cNvPr id="20" name="Rounded Rectangle 19"/>
-          <p:cNvSpPr/>
-          <p:nvPr/>
-        </p:nvSpPr>
-        <p:spPr>
-          <a:xfrm>
-            <a:off x="7452360" y="960120"/>
-            <a:ext cx="3840480" cy="658368"/>
-          </a:xfrm>
-          <a:prstGeom prst="roundRect">
-            <a:avLst>
-              <a:gd name="adj" fmla="val 14000"/>
-            </a:avLst>
-          </a:prstGeom>
-          <a:solidFill>
-            <a:srgbClr val="FFFFFF"/>
-          </a:solidFill>
-          <a:ln>
-            <a:noFill/>
-          </a:ln>
-          <a:effectLst/>
-        </p:spPr>
-        <p:style>
-          <a:lnRef idx="1">
-            <a:schemeClr val="accent1"/>
-          </a:lnRef>
-          <a:fillRef idx="3">
-            <a:schemeClr val="accent1"/>
-          </a:fillRef>
-          <a:effectRef idx="2">
-            <a:schemeClr val="accent1"/>
-          </a:effectRef>
-          <a:fontRef idx="minor">
-            <a:schemeClr val="lt1"/>
-          </a:fontRef>
-        </p:style>
-        <p:txBody>
-          <a:bodyPr rtlCol="0" anchor="ctr" lIns="164592" wrap="square"/>
-          <a:lstStyle/>
-          <a:p>
-            <a:pPr algn="ctr"/>
-            <a:r>
-              <a:rPr sz="1500" b="1" i="0">
-                <a:solidFill>
-                  <a:srgbClr val="1A1A1A"/>
-                </a:solidFill>
-                <a:latin typeface="Arial"/>
-              </a:rPr>
-              <a:t>Discover</a:t>
-            </a:r>
-          </a:p>
-        </p:txBody>
-      </p:sp>
-      <p:sp>
-        <p:nvSpPr>
-          <p:cNvPr id="21" name="Diamond 20"/>
-          <p:cNvSpPr/>
-          <p:nvPr/>
-        </p:nvSpPr>
-        <p:spPr>
-          <a:xfrm>
-            <a:off x="7333488" y="1677924"/>
-            <a:ext cx="128016" cy="128016"/>
-          </a:xfrm>
-          <a:prstGeom prst="diamond">
-            <a:avLst/>
-          </a:prstGeom>
-          <a:solidFill>
-            <a:srgbClr val="E5F5FB"/>
-          </a:solidFill>
-          <a:ln>
-            <a:noFill/>
-          </a:ln>
-          <a:effectLst/>
-        </p:spPr>
-        <p:style>
-          <a:lnRef idx="1">
-            <a:schemeClr val="accent1"/>
-          </a:lnRef>
-          <a:fillRef idx="3">
-            <a:schemeClr val="accent1"/>
-          </a:fillRef>
-          <a:effectRef idx="2">
-            <a:schemeClr val="accent1"/>
-          </a:effectRef>
-          <a:fontRef idx="minor">
-            <a:schemeClr val="lt1"/>
-          </a:fontRef>
-        </p:style>
-        <p:txBody>
-          <a:bodyPr rtlCol="0" anchor="ctr"/>
-          <a:lstStyle/>
-          <a:p>
-            <a:pPr algn="ctr"/>
-          </a:p>
-        </p:txBody>
-      </p:sp>
-      <p:sp>
-        <p:nvSpPr>
-          <p:cNvPr id="22" name="Rounded Rectangle 21"/>
-          <p:cNvSpPr/>
-          <p:nvPr/>
-        </p:nvSpPr>
-        <p:spPr>
-          <a:xfrm>
-            <a:off x="7452360" y="1892808"/>
-            <a:ext cx="3840480" cy="658368"/>
-          </a:xfrm>
-          <a:prstGeom prst="roundRect">
-            <a:avLst>
-              <a:gd name="adj" fmla="val 14000"/>
-            </a:avLst>
-          </a:prstGeom>
-          <a:solidFill>
-            <a:srgbClr val="FFFFFF"/>
-          </a:solidFill>
-          <a:ln>
-            <a:noFill/>
-          </a:ln>
-          <a:effectLst/>
-        </p:spPr>
-        <p:style>
-          <a:lnRef idx="1">
-            <a:schemeClr val="accent1"/>
-          </a:lnRef>
-          <a:fillRef idx="3">
-            <a:schemeClr val="accent1"/>
-          </a:fillRef>
-          <a:effectRef idx="2">
-            <a:schemeClr val="accent1"/>
-          </a:effectRef>
-          <a:fontRef idx="minor">
-            <a:schemeClr val="lt1"/>
-          </a:fontRef>
-        </p:style>
-        <p:txBody>
-          <a:bodyPr rtlCol="0" anchor="ctr" lIns="164592" wrap="square"/>
-          <a:lstStyle/>
-          <a:p>
-            <a:pPr algn="ctr"/>
-            <a:r>
-              <a:rPr sz="1500" b="1" i="0">
-                <a:solidFill>
-                  <a:srgbClr val="1A1A1A"/>
-                </a:solidFill>
-                <a:latin typeface="Arial"/>
-              </a:rPr>
-              <a:t>Assess</a:t>
-            </a:r>
-          </a:p>
-        </p:txBody>
-      </p:sp>
-      <p:sp>
-        <p:nvSpPr>
-          <p:cNvPr id="23" name="Diamond 22"/>
-          <p:cNvSpPr/>
-          <p:nvPr/>
-        </p:nvSpPr>
-        <p:spPr>
-          <a:xfrm>
-            <a:off x="7333488" y="2610612"/>
-            <a:ext cx="128016" cy="128016"/>
-          </a:xfrm>
-          <a:prstGeom prst="diamond">
-            <a:avLst/>
-          </a:prstGeom>
-          <a:solidFill>
-            <a:srgbClr val="E5F5FB"/>
-          </a:solidFill>
-          <a:ln>
-            <a:noFill/>
-          </a:ln>
-          <a:effectLst/>
-        </p:spPr>
-        <p:style>
-          <a:lnRef idx="1">
-            <a:schemeClr val="accent1"/>
-          </a:lnRef>
-          <a:fillRef idx="3">
-            <a:schemeClr val="accent1"/>
-          </a:fillRef>
-          <a:effectRef idx="2">
-            <a:schemeClr val="accent1"/>
-          </a:effectRef>
-          <a:fontRef idx="minor">
-            <a:schemeClr val="lt1"/>
-          </a:fontRef>
-        </p:style>
-        <p:txBody>
-          <a:bodyPr rtlCol="0" anchor="ctr"/>
-          <a:lstStyle/>
-          <a:p>
-            <a:pPr algn="ctr"/>
-          </a:p>
-        </p:txBody>
-      </p:sp>
-      <p:sp>
-        <p:nvSpPr>
-          <p:cNvPr id="24" name="Rounded Rectangle 23"/>
-          <p:cNvSpPr/>
-          <p:nvPr/>
-        </p:nvSpPr>
-        <p:spPr>
-          <a:xfrm>
-            <a:off x="7452360" y="2825496"/>
-            <a:ext cx="3840480" cy="658368"/>
-          </a:xfrm>
-          <a:prstGeom prst="roundRect">
-            <a:avLst>
-              <a:gd name="adj" fmla="val 14000"/>
-            </a:avLst>
-          </a:prstGeom>
-          <a:solidFill>
-            <a:srgbClr val="FFFFFF"/>
-          </a:solidFill>
-          <a:ln>
-            <a:noFill/>
-          </a:ln>
-          <a:effectLst/>
-        </p:spPr>
-        <p:style>
-          <a:lnRef idx="1">
-            <a:schemeClr val="accent1"/>
-          </a:lnRef>
-          <a:fillRef idx="3">
-            <a:schemeClr val="accent1"/>
-          </a:fillRef>
-          <a:effectRef idx="2">
-            <a:schemeClr val="accent1"/>
-          </a:effectRef>
-          <a:fontRef idx="minor">
-            <a:schemeClr val="lt1"/>
-          </a:fontRef>
-        </p:style>
-        <p:txBody>
-          <a:bodyPr rtlCol="0" anchor="ctr" lIns="164592" wrap="square"/>
-          <a:lstStyle/>
-          <a:p>
-            <a:pPr algn="ctr"/>
-            <a:r>
-              <a:rPr sz="1500" b="1" i="0">
-                <a:solidFill>
-                  <a:srgbClr val="1A1A1A"/>
-                </a:solidFill>
-                <a:latin typeface="Arial"/>
-              </a:rPr>
-              <a:t>Adapt</a:t>
-            </a:r>
-          </a:p>
-        </p:txBody>
-      </p:sp>
-      <p:sp>
-        <p:nvSpPr>
-          <p:cNvPr id="25" name="Diamond 24"/>
-          <p:cNvSpPr/>
-          <p:nvPr/>
-        </p:nvSpPr>
-        <p:spPr>
-          <a:xfrm>
-            <a:off x="7333488" y="3543300"/>
-            <a:ext cx="128016" cy="128016"/>
-          </a:xfrm>
-          <a:prstGeom prst="diamond">
-            <a:avLst/>
-          </a:prstGeom>
-          <a:solidFill>
-            <a:srgbClr val="E5F5FB"/>
-          </a:solidFill>
-          <a:ln>
-            <a:noFill/>
-          </a:ln>
-          <a:effectLst/>
-        </p:spPr>
-        <p:style>
-          <a:lnRef idx="1">
-            <a:schemeClr val="accent1"/>
-          </a:lnRef>
-          <a:fillRef idx="3">
-            <a:schemeClr val="accent1"/>
-          </a:fillRef>
-          <a:effectRef idx="2">
-            <a:schemeClr val="accent1"/>
-          </a:effectRef>
-          <a:fontRef idx="minor">
-            <a:schemeClr val="lt1"/>
-          </a:fontRef>
-        </p:style>
-        <p:txBody>
-          <a:bodyPr rtlCol="0" anchor="ctr"/>
-          <a:lstStyle/>
-          <a:p>
-            <a:pPr algn="ctr"/>
-          </a:p>
-        </p:txBody>
-      </p:sp>
-      <p:sp>
-        <p:nvSpPr>
-          <p:cNvPr id="26" name="Rounded Rectangle 25"/>
-          <p:cNvSpPr/>
-          <p:nvPr/>
-        </p:nvSpPr>
-        <p:spPr>
-          <a:xfrm>
-            <a:off x="7452360" y="3758184"/>
-            <a:ext cx="3840480" cy="658368"/>
-          </a:xfrm>
-          <a:prstGeom prst="roundRect">
-            <a:avLst>
-              <a:gd name="adj" fmla="val 14000"/>
-            </a:avLst>
-          </a:prstGeom>
-          <a:solidFill>
-            <a:srgbClr val="FFFFFF"/>
-          </a:solidFill>
-          <a:ln>
-            <a:noFill/>
-          </a:ln>
-          <a:effectLst/>
-        </p:spPr>
-        <p:style>
-          <a:lnRef idx="1">
-            <a:schemeClr val="accent1"/>
-          </a:lnRef>
-          <a:fillRef idx="3">
-            <a:schemeClr val="accent1"/>
-          </a:fillRef>
-          <a:effectRef idx="2">
-            <a:schemeClr val="accent1"/>
-          </a:effectRef>
-          <a:fontRef idx="minor">
-            <a:schemeClr val="lt1"/>
-          </a:fontRef>
-        </p:style>
-        <p:txBody>
-          <a:bodyPr rtlCol="0" anchor="ctr" lIns="164592" wrap="square"/>
-          <a:lstStyle/>
-          <a:p>
-            <a:pPr algn="ctr"/>
-            <a:r>
-              <a:rPr sz="1500" b="1" i="0">
-                <a:solidFill>
-                  <a:srgbClr val="1A1A1A"/>
-                </a:solidFill>
-                <a:latin typeface="Arial"/>
-              </a:rPr>
-              <a:t>Plan</a:t>
-            </a:r>
-          </a:p>
-        </p:txBody>
-      </p:sp>
-      <p:sp>
-        <p:nvSpPr>
-          <p:cNvPr id="27" name="Diamond 26"/>
-          <p:cNvSpPr/>
-          <p:nvPr/>
-        </p:nvSpPr>
-        <p:spPr>
-          <a:xfrm>
-            <a:off x="7333488" y="4475988"/>
-            <a:ext cx="128016" cy="128016"/>
-          </a:xfrm>
-          <a:prstGeom prst="diamond">
-            <a:avLst/>
-          </a:prstGeom>
-          <a:solidFill>
-            <a:srgbClr val="E5F5FB"/>
-          </a:solidFill>
-          <a:ln>
-            <a:noFill/>
-          </a:ln>
-          <a:effectLst/>
-        </p:spPr>
-        <p:style>
-          <a:lnRef idx="1">
-            <a:schemeClr val="accent1"/>
-          </a:lnRef>
-          <a:fillRef idx="3">
-            <a:schemeClr val="accent1"/>
-          </a:fillRef>
-          <a:effectRef idx="2">
-            <a:schemeClr val="accent1"/>
-          </a:effectRef>
-          <a:fontRef idx="minor">
-            <a:schemeClr val="lt1"/>
-          </a:fontRef>
-        </p:style>
-        <p:txBody>
-          <a:bodyPr rtlCol="0" anchor="ctr"/>
-          <a:lstStyle/>
-          <a:p>
-            <a:pPr algn="ctr"/>
-          </a:p>
-        </p:txBody>
-      </p:sp>
-      <p:sp>
-        <p:nvSpPr>
-          <p:cNvPr id="28" name="Rounded Rectangle 27"/>
-          <p:cNvSpPr/>
-          <p:nvPr/>
-        </p:nvSpPr>
-        <p:spPr>
-          <a:xfrm>
-            <a:off x="7452360" y="4690872"/>
-            <a:ext cx="3840480" cy="658368"/>
-          </a:xfrm>
-          <a:prstGeom prst="roundRect">
-            <a:avLst>
-              <a:gd name="adj" fmla="val 14000"/>
-            </a:avLst>
-          </a:prstGeom>
-          <a:solidFill>
-            <a:srgbClr val="006E96"/>
-          </a:solidFill>
-          <a:ln>
-            <a:noFill/>
-          </a:ln>
-          <a:effectLst/>
-        </p:spPr>
-        <p:style>
-          <a:lnRef idx="1">
-            <a:schemeClr val="accent1"/>
-          </a:lnRef>
-          <a:fillRef idx="3">
-            <a:schemeClr val="accent1"/>
-          </a:fillRef>
-          <a:effectRef idx="2">
-            <a:schemeClr val="accent1"/>
-          </a:effectRef>
-          <a:fontRef idx="minor">
-            <a:schemeClr val="lt1"/>
-          </a:fontRef>
-        </p:style>
-        <p:txBody>
-          <a:bodyPr rtlCol="0" anchor="ctr" lIns="164592" wrap="square"/>
-          <a:lstStyle/>
-          <a:p>
-            <a:pPr algn="ctr"/>
-            <a:r>
-              <a:rPr sz="1500" b="1" i="0">
-                <a:solidFill>
-                  <a:srgbClr val="FFFFFF"/>
-                </a:solidFill>
-                <a:latin typeface="Arial"/>
-              </a:rPr>
-              <a:t>Execute &amp; Govern</a:t>
-            </a:r>
-          </a:p>
-        </p:txBody>
-      </p:sp>
-      <p:sp>
-        <p:nvSpPr>
-          <p:cNvPr id="29" name="TextBox 28"/>
-          <p:cNvSpPr txBox="1"/>
-          <p:nvPr/>
-        </p:nvSpPr>
-        <p:spPr>
-          <a:xfrm>
-            <a:off x="7452360" y="5806440"/>
-            <a:ext cx="4297680" cy="731520"/>
-          </a:xfrm>
-          <a:prstGeom prst="rect">
-            <a:avLst/>
-          </a:prstGeom>
-          <a:noFill/>
-        </p:spPr>
-        <p:txBody>
-          <a:bodyPr wrap="square">
-            <a:spAutoFit/>
-          </a:bodyPr>
-          <a:lstStyle/>
-          <a:p>
-            <a:r>
-              <a:rPr sz="1200" b="0" i="0">
-                <a:solidFill>
-                  <a:srgbClr val="FFFFFF"/>
-                </a:solidFill>
-                <a:latin typeface="Arial"/>
-              </a:rPr>
-              <a:t>4 sign-offs · 6 months to a roadmap · then ongoing</a:t>
-            </a:r>
-          </a:p>
-        </p:txBody>
-      </p:sp>
-    </p:spTree>
-    <p:extLst>
-      <p:ext uri="{BB962C8B-B14F-4D97-AF65-F5344CB8AC3E}">
-        <p14:creationId xmlns:p14="http://schemas.microsoft.com/office/powerpoint/2010/main" val="1196800265"/>
-      </p:ext>
-    </p:extLst>
-  </p:cSld>
-  <p:clrMapOvr>
-    <a:masterClrMapping/>
-  </p:clrMapOvr>
-</p:sld>
-</file>
-
-<file path=ppt/slides/slide22.xml><?xml version="1.0" encoding="utf-8"?>
-<p:sld xmlns:a="http://schemas.openxmlformats.org/drawingml/2006/main" xmlns:p="http://schemas.openxmlformats.org/presentationml/2006/main" xmlns:r="http://schemas.openxmlformats.org/officeDocument/2006/relationships">
-  <p:cSld>
-    <p:spTree>
-      <p:nvGrpSpPr>
-        <p:cNvPr id="1" name=""/>
-        <p:cNvGrpSpPr/>
-        <p:nvPr/>
-      </p:nvGrpSpPr>
-      <p:grpSpPr/>
-      <p:sp>
-        <p:nvSpPr>
-          <p:cNvPr id="2" name="TextBox 1"/>
-          <p:cNvSpPr txBox="1"/>
-          <p:nvPr/>
-        </p:nvSpPr>
-        <p:spPr>
-          <a:xfrm>
-            <a:off x="822960" y="822960"/>
-            <a:ext cx="7315200" cy="457200"/>
-          </a:xfrm>
-          <a:prstGeom prst="rect">
-            <a:avLst/>
-          </a:prstGeom>
-          <a:noFill/>
-        </p:spPr>
-        <p:txBody>
-          <a:bodyPr wrap="square">
-            <a:spAutoFit/>
-          </a:bodyPr>
-          <a:lstStyle/>
-          <a:p>
-            <a:r>
-              <a:rPr sz="1200" b="1" i="0">
-                <a:solidFill>
-                  <a:srgbClr val="595959"/>
-                </a:solidFill>
-                <a:latin typeface="Arial"/>
-              </a:rPr>
-              <a:t>KP1 · MODULE 1 · VIDEO 1.4</a:t>
-            </a:r>
-          </a:p>
-        </p:txBody>
-      </p:sp>
-      <p:sp>
-        <p:nvSpPr>
-          <p:cNvPr id="3" name="TextBox 2"/>
-          <p:cNvSpPr txBox="1"/>
-          <p:nvPr/>
-        </p:nvSpPr>
-        <p:spPr>
-          <a:xfrm>
-            <a:off x="822960" y="1828800"/>
-            <a:ext cx="2011680" cy="1097280"/>
-          </a:xfrm>
-          <a:prstGeom prst="rect">
-            <a:avLst/>
-          </a:prstGeom>
-          <a:noFill/>
-        </p:spPr>
-        <p:txBody>
-          <a:bodyPr wrap="square">
-            <a:spAutoFit/>
-          </a:bodyPr>
-          <a:lstStyle/>
-          <a:p>
-            <a:r>
-              <a:rPr sz="6000" b="1" i="0">
-                <a:solidFill>
-                  <a:srgbClr val="009CD6"/>
-                </a:solidFill>
-                <a:latin typeface="Arial"/>
-              </a:rPr>
-              <a:t>1.4</a:t>
-            </a:r>
-          </a:p>
-        </p:txBody>
-      </p:sp>
-      <p:sp>
-        <p:nvSpPr>
-          <p:cNvPr id="4" name="TextBox 3"/>
-          <p:cNvSpPr txBox="1"/>
-          <p:nvPr/>
-        </p:nvSpPr>
-        <p:spPr>
-          <a:xfrm>
-            <a:off x="822960" y="2880360"/>
-            <a:ext cx="9601200" cy="1371600"/>
-          </a:xfrm>
-          <a:prstGeom prst="rect">
-            <a:avLst/>
-          </a:prstGeom>
-          <a:noFill/>
-        </p:spPr>
-        <p:txBody>
-          <a:bodyPr wrap="square">
-            <a:spAutoFit/>
-          </a:bodyPr>
-          <a:lstStyle/>
-          <a:p>
-            <a:r>
-              <a:rPr sz="3400" b="1" i="0">
-                <a:solidFill>
-                  <a:srgbClr val="1A1A1A"/>
-                </a:solidFill>
-                <a:latin typeface="Arial"/>
-              </a:rPr>
-              <a:t>Why an EA matters more now</a:t>
-            </a:r>
-          </a:p>
-        </p:txBody>
-      </p:sp>
-      <p:sp>
-        <p:nvSpPr>
-          <p:cNvPr id="5" name="TextBox 4"/>
-          <p:cNvSpPr txBox="1"/>
-          <p:nvPr/>
-        </p:nvSpPr>
-        <p:spPr>
-          <a:xfrm>
-            <a:off x="822960" y="4343400"/>
-            <a:ext cx="9875520" cy="1554480"/>
-          </a:xfrm>
-          <a:prstGeom prst="rect">
-            <a:avLst/>
-          </a:prstGeom>
-          <a:noFill/>
-        </p:spPr>
-        <p:txBody>
-          <a:bodyPr wrap="square">
-            <a:spAutoFit/>
-          </a:bodyPr>
-          <a:lstStyle/>
-          <a:p>
-            <a:r>
-              <a:rPr sz="1700" b="0" i="1">
-                <a:solidFill>
-                  <a:srgbClr val="595959"/>
-                </a:solidFill>
-                <a:latin typeface="Arial"/>
-              </a:rPr>
-              <a:t>For thirty years, digital work meant putting paper online. That era is ending. The work now is to redesign how your ministry serves citizens — and that work needs business and IT in the same room, using the same words.</a:t>
-            </a:r>
-          </a:p>
-        </p:txBody>
-      </p:sp>
-      <p:sp>
-        <p:nvSpPr>
-          <p:cNvPr id="6" name="TextBox 5"/>
-          <p:cNvSpPr txBox="1"/>
-          <p:nvPr/>
-        </p:nvSpPr>
-        <p:spPr>
-          <a:xfrm>
-            <a:off x="822960" y="5989320"/>
-            <a:ext cx="7315200" cy="365760"/>
-          </a:xfrm>
-          <a:prstGeom prst="rect">
-            <a:avLst/>
-          </a:prstGeom>
-          <a:noFill/>
-        </p:spPr>
-        <p:txBody>
-          <a:bodyPr wrap="square">
-            <a:spAutoFit/>
-          </a:bodyPr>
-          <a:lstStyle/>
-          <a:p>
-            <a:r>
-              <a:rPr sz="1200" b="0" i="0">
-                <a:solidFill>
-                  <a:srgbClr val="595959"/>
-                </a:solidFill>
-                <a:latin typeface="Arial"/>
-              </a:rPr>
-              <a:t>standalone video · voice-over on text slides</a:t>
-            </a:r>
-          </a:p>
-        </p:txBody>
-      </p:sp>
-    </p:spTree>
-  </p:cSld>
-  <p:clrMapOvr>
-    <a:masterClrMapping/>
-  </p:clrMapOvr>
-</p:sld>
-</file>
-
-<file path=ppt/slides/slide23.xml><?xml version="1.0" encoding="utf-8"?>
-<p:sld xmlns:a="http://schemas.openxmlformats.org/drawingml/2006/main" xmlns:p="http://schemas.openxmlformats.org/presentationml/2006/main" xmlns:r="http://schemas.openxmlformats.org/officeDocument/2006/relationships">
-  <p:cSld>
-    <p:spTree>
-      <p:nvGrpSpPr>
-        <p:cNvPr id="1" name=""/>
-        <p:cNvGrpSpPr/>
-        <p:nvPr/>
-      </p:nvGrpSpPr>
-      <p:grpSpPr/>
-      <p:sp>
-        <p:nvSpPr>
-          <p:cNvPr id="2" name="Rectangle 1"/>
-          <p:cNvSpPr/>
-          <p:nvPr/>
-        </p:nvSpPr>
-        <p:spPr>
-          <a:xfrm>
-            <a:off x="457200" y="384048"/>
-            <a:ext cx="45720" cy="256032"/>
-          </a:xfrm>
-          <a:prstGeom prst="rect">
-            <a:avLst/>
-          </a:prstGeom>
-          <a:solidFill>
-            <a:srgbClr val="009CD6"/>
-          </a:solidFill>
-          <a:ln>
-            <a:noFill/>
-          </a:ln>
-          <a:effectLst/>
-        </p:spPr>
-        <p:style>
-          <a:lnRef idx="1">
-            <a:schemeClr val="accent1"/>
-          </a:lnRef>
-          <a:fillRef idx="3">
-            <a:schemeClr val="accent1"/>
-          </a:fillRef>
-          <a:effectRef idx="2">
-            <a:schemeClr val="accent1"/>
-          </a:effectRef>
-          <a:fontRef idx="minor">
-            <a:schemeClr val="lt1"/>
-          </a:fontRef>
-        </p:style>
-        <p:txBody>
-          <a:bodyPr rtlCol="0" anchor="ctr"/>
-          <a:lstStyle/>
-          <a:p>
-            <a:pPr algn="ctr"/>
-          </a:p>
-        </p:txBody>
-      </p:sp>
-      <p:sp>
-        <p:nvSpPr>
-          <p:cNvPr id="3" name="TextBox 2"/>
-          <p:cNvSpPr txBox="1"/>
-          <p:nvPr/>
-        </p:nvSpPr>
-        <p:spPr>
-          <a:xfrm>
-            <a:off x="621792" y="274320"/>
-            <a:ext cx="11247120" cy="914400"/>
-          </a:xfrm>
-          <a:prstGeom prst="rect">
-            <a:avLst/>
-          </a:prstGeom>
-          <a:noFill/>
-        </p:spPr>
-        <p:txBody>
-          <a:bodyPr wrap="square">
-            <a:spAutoFit/>
-          </a:bodyPr>
-          <a:lstStyle/>
-          <a:p>
-            <a:r>
-              <a:rPr sz="2800" b="1" i="0">
-                <a:solidFill>
-                  <a:srgbClr val="1A1A1A"/>
-                </a:solidFill>
-                <a:latin typeface="Arial"/>
-              </a:rPr>
-              <a:t>Putting paper online is no longer the main work</a:t>
-            </a:r>
-          </a:p>
-        </p:txBody>
-      </p:sp>
-      <p:sp>
-        <p:nvSpPr>
-          <p:cNvPr id="4" name="Rounded Rectangle 3"/>
-          <p:cNvSpPr/>
-          <p:nvPr/>
-        </p:nvSpPr>
-        <p:spPr>
-          <a:xfrm>
-            <a:off x="658368" y="1554480"/>
-            <a:ext cx="5394960" cy="4206240"/>
-          </a:xfrm>
-          <a:prstGeom prst="roundRect">
-            <a:avLst>
-              <a:gd name="adj" fmla="val 4500"/>
-            </a:avLst>
-          </a:prstGeom>
-          <a:solidFill>
-            <a:srgbClr val="F2F2F2"/>
-          </a:solidFill>
-          <a:ln>
-            <a:noFill/>
-          </a:ln>
-          <a:effectLst/>
-        </p:spPr>
-        <p:style>
-          <a:lnRef idx="1">
-            <a:schemeClr val="accent1"/>
-          </a:lnRef>
-          <a:fillRef idx="3">
-            <a:schemeClr val="accent1"/>
-          </a:fillRef>
-          <a:effectRef idx="2">
-            <a:schemeClr val="accent1"/>
-          </a:effectRef>
-          <a:fontRef idx="minor">
-            <a:schemeClr val="lt1"/>
-          </a:fontRef>
-        </p:style>
-        <p:txBody>
-          <a:bodyPr rtlCol="0" anchor="ctr"/>
-          <a:lstStyle/>
-          <a:p>
-            <a:pPr algn="ctr"/>
-          </a:p>
-        </p:txBody>
-      </p:sp>
-      <p:sp>
-        <p:nvSpPr>
-          <p:cNvPr id="5" name="TextBox 4"/>
-          <p:cNvSpPr txBox="1"/>
-          <p:nvPr/>
-        </p:nvSpPr>
-        <p:spPr>
-          <a:xfrm>
-            <a:off x="859536" y="1700784"/>
-            <a:ext cx="4992624" cy="3931920"/>
-          </a:xfrm>
-          <a:prstGeom prst="rect">
-            <a:avLst/>
-          </a:prstGeom>
-          <a:noFill/>
-        </p:spPr>
-        <p:txBody>
-          <a:bodyPr wrap="square">
-            <a:spAutoFit/>
-          </a:bodyPr>
-          <a:lstStyle/>
-          <a:p>
-            <a:pPr>
-              <a:spcAft>
-                <a:spcPts val="700"/>
-              </a:spcAft>
-            </a:pPr>
-            <a:r>
-              <a:rPr sz="1900" b="1" i="0">
-                <a:solidFill>
-                  <a:srgbClr val="595959"/>
-                </a:solidFill>
-                <a:latin typeface="Arial"/>
-              </a:rPr>
-              <a:t>The old work</a:t>
-            </a:r>
-          </a:p>
-          <a:p>
-            <a:pPr>
-              <a:spcAft>
-                <a:spcPts val="700"/>
-              </a:spcAft>
-            </a:pPr>
-            <a:r>
-              <a:rPr sz="1600" b="0" i="0">
-                <a:solidFill>
-                  <a:srgbClr val="1A1A1A"/>
-                </a:solidFill>
-                <a:latin typeface="Arial"/>
-              </a:rPr>
-              <a:t>Take a paper process and put it online</a:t>
-            </a:r>
-          </a:p>
-          <a:p>
-            <a:pPr>
-              <a:spcAft>
-                <a:spcPts val="700"/>
-              </a:spcAft>
-            </a:pPr>
-            <a:r>
-              <a:rPr sz="1600" b="0" i="0">
-                <a:solidFill>
-                  <a:srgbClr val="1A1A1A"/>
-                </a:solidFill>
-                <a:latin typeface="Arial"/>
-              </a:rPr>
-              <a:t>The ministry’s operating model stays the same</a:t>
-            </a:r>
-          </a:p>
-          <a:p>
-            <a:pPr>
-              <a:spcAft>
-                <a:spcPts val="700"/>
-              </a:spcAft>
-            </a:pPr>
-            <a:r>
-              <a:rPr sz="1600" b="0" i="0">
-                <a:solidFill>
-                  <a:srgbClr val="1A1A1A"/>
-                </a:solidFill>
-                <a:latin typeface="Arial"/>
-              </a:rPr>
-              <a:t>Business decides what; IT delivers how</a:t>
-            </a:r>
-          </a:p>
-        </p:txBody>
-      </p:sp>
-      <p:sp>
-        <p:nvSpPr>
-          <p:cNvPr id="6" name="Rounded Rectangle 5"/>
-          <p:cNvSpPr/>
-          <p:nvPr/>
-        </p:nvSpPr>
-        <p:spPr>
-          <a:xfrm>
-            <a:off x="6281928" y="1554480"/>
-            <a:ext cx="5394960" cy="4206240"/>
-          </a:xfrm>
-          <a:prstGeom prst="roundRect">
-            <a:avLst>
-              <a:gd name="adj" fmla="val 4500"/>
-            </a:avLst>
-          </a:prstGeom>
-          <a:solidFill>
-            <a:srgbClr val="E5F5FB"/>
-          </a:solidFill>
-          <a:ln>
-            <a:noFill/>
-          </a:ln>
-          <a:effectLst/>
-        </p:spPr>
-        <p:style>
-          <a:lnRef idx="1">
-            <a:schemeClr val="accent1"/>
-          </a:lnRef>
-          <a:fillRef idx="3">
-            <a:schemeClr val="accent1"/>
-          </a:fillRef>
-          <a:effectRef idx="2">
-            <a:schemeClr val="accent1"/>
-          </a:effectRef>
-          <a:fontRef idx="minor">
-            <a:schemeClr val="lt1"/>
-          </a:fontRef>
-        </p:style>
-        <p:txBody>
-          <a:bodyPr rtlCol="0" anchor="ctr"/>
-          <a:lstStyle/>
-          <a:p>
-            <a:pPr algn="ctr"/>
-          </a:p>
-        </p:txBody>
-      </p:sp>
-      <p:sp>
-        <p:nvSpPr>
-          <p:cNvPr id="7" name="TextBox 6"/>
-          <p:cNvSpPr txBox="1"/>
-          <p:nvPr/>
-        </p:nvSpPr>
-        <p:spPr>
-          <a:xfrm>
-            <a:off x="6483096" y="1700784"/>
-            <a:ext cx="4992624" cy="3931920"/>
-          </a:xfrm>
-          <a:prstGeom prst="rect">
-            <a:avLst/>
-          </a:prstGeom>
-          <a:noFill/>
-        </p:spPr>
-        <p:txBody>
-          <a:bodyPr wrap="square">
-            <a:spAutoFit/>
-          </a:bodyPr>
-          <a:lstStyle/>
-          <a:p>
-            <a:pPr>
-              <a:spcAft>
-                <a:spcPts val="700"/>
-              </a:spcAft>
-            </a:pPr>
-            <a:r>
-              <a:rPr sz="1900" b="1" i="0">
-                <a:solidFill>
-                  <a:srgbClr val="006E96"/>
-                </a:solidFill>
-                <a:latin typeface="Arial"/>
-              </a:rPr>
-              <a:t>The new work</a:t>
-            </a:r>
-          </a:p>
-          <a:p>
-            <a:pPr>
-              <a:spcAft>
-                <a:spcPts val="700"/>
-              </a:spcAft>
-            </a:pPr>
-            <a:r>
-              <a:rPr sz="1600" b="0" i="0">
-                <a:solidFill>
-                  <a:srgbClr val="1A1A1A"/>
-                </a:solidFill>
-                <a:latin typeface="Arial"/>
-              </a:rPr>
-              <a:t>Redesign how citizens are served</a:t>
-            </a:r>
-          </a:p>
-          <a:p>
-            <a:pPr>
-              <a:spcAft>
-                <a:spcPts val="700"/>
-              </a:spcAft>
-            </a:pPr>
-            <a:r>
-              <a:rPr sz="1600" b="0" i="0">
-                <a:solidFill>
-                  <a:srgbClr val="1A1A1A"/>
-                </a:solidFill>
-                <a:latin typeface="Arial"/>
-              </a:rPr>
-              <a:t>The ministry’s operating model changes</a:t>
-            </a:r>
-          </a:p>
-          <a:p>
-            <a:pPr>
-              <a:spcAft>
-                <a:spcPts val="700"/>
-              </a:spcAft>
-            </a:pPr>
-            <a:r>
-              <a:rPr sz="1600" b="1" i="0">
-                <a:solidFill>
-                  <a:srgbClr val="1A1A1A"/>
-                </a:solidFill>
-                <a:latin typeface="Arial"/>
-              </a:rPr>
-              <a:t>Business and IT decide together</a:t>
-            </a:r>
-          </a:p>
-        </p:txBody>
-      </p:sp>
-      <p:sp>
-        <p:nvSpPr>
-          <p:cNvPr id="8" name="TextBox 7"/>
-          <p:cNvSpPr txBox="1"/>
-          <p:nvPr/>
-        </p:nvSpPr>
-        <p:spPr>
-          <a:xfrm>
-            <a:off x="457200" y="6473952"/>
-            <a:ext cx="7772400" cy="292608"/>
-          </a:xfrm>
-          <a:prstGeom prst="rect">
-            <a:avLst/>
-          </a:prstGeom>
-          <a:noFill/>
-        </p:spPr>
-        <p:txBody>
-          <a:bodyPr wrap="square">
-            <a:spAutoFit/>
-          </a:bodyPr>
-          <a:lstStyle/>
-          <a:p>
-            <a:r>
-              <a:rPr sz="900" b="0" i="0">
-                <a:solidFill>
-                  <a:srgbClr val="595959"/>
-                </a:solidFill>
-                <a:latin typeface="Arial"/>
-              </a:rPr>
-              <a:t>1.4 · Why an EA matters more now</a:t>
-            </a:r>
-          </a:p>
-        </p:txBody>
-      </p:sp>
-    </p:spTree>
-  </p:cSld>
-  <p:clrMapOvr>
-    <a:masterClrMapping/>
-  </p:clrMapOvr>
-</p:sld>
-</file>
-
-<file path=ppt/slides/slide24.xml><?xml version="1.0" encoding="utf-8"?>
-<p:sld xmlns:a="http://schemas.openxmlformats.org/drawingml/2006/main" xmlns:p="http://schemas.openxmlformats.org/presentationml/2006/main" xmlns:r="http://schemas.openxmlformats.org/officeDocument/2006/relationships">
-  <p:cSld>
-    <p:spTree>
-      <p:nvGrpSpPr>
-        <p:cNvPr id="1" name=""/>
-        <p:cNvGrpSpPr/>
-        <p:nvPr/>
-      </p:nvGrpSpPr>
-      <p:grpSpPr/>
-      <p:sp>
-        <p:nvSpPr>
-          <p:cNvPr id="2" name="Rectangle 1"/>
-          <p:cNvSpPr/>
-          <p:nvPr/>
-        </p:nvSpPr>
-        <p:spPr>
-          <a:xfrm>
-            <a:off x="457200" y="384048"/>
-            <a:ext cx="45720" cy="256032"/>
-          </a:xfrm>
-          <a:prstGeom prst="rect">
-            <a:avLst/>
-          </a:prstGeom>
-          <a:solidFill>
-            <a:srgbClr val="009CD6"/>
-          </a:solidFill>
-          <a:ln>
-            <a:noFill/>
-          </a:ln>
-          <a:effectLst/>
-        </p:spPr>
-        <p:style>
-          <a:lnRef idx="1">
-            <a:schemeClr val="accent1"/>
-          </a:lnRef>
-          <a:fillRef idx="3">
-            <a:schemeClr val="accent1"/>
-          </a:fillRef>
-          <a:effectRef idx="2">
-            <a:schemeClr val="accent1"/>
-          </a:effectRef>
-          <a:fontRef idx="minor">
-            <a:schemeClr val="lt1"/>
-          </a:fontRef>
-        </p:style>
-        <p:txBody>
-          <a:bodyPr rtlCol="0" anchor="ctr"/>
-          <a:lstStyle/>
-          <a:p>
-            <a:pPr algn="ctr"/>
-          </a:p>
-        </p:txBody>
-      </p:sp>
-      <p:sp>
-        <p:nvSpPr>
-          <p:cNvPr id="3" name="TextBox 2"/>
-          <p:cNvSpPr txBox="1"/>
-          <p:nvPr/>
-        </p:nvSpPr>
-        <p:spPr>
-          <a:xfrm>
-            <a:off x="621792" y="274320"/>
-            <a:ext cx="11247120" cy="914400"/>
-          </a:xfrm>
-          <a:prstGeom prst="rect">
-            <a:avLst/>
-          </a:prstGeom>
-          <a:noFill/>
-        </p:spPr>
-        <p:txBody>
-          <a:bodyPr wrap="square">
-            <a:spAutoFit/>
-          </a:bodyPr>
-          <a:lstStyle/>
-          <a:p>
-            <a:r>
-              <a:rPr sz="2800" b="1" i="0">
-                <a:solidFill>
-                  <a:srgbClr val="1A1A1A"/>
-                </a:solidFill>
-                <a:latin typeface="Arial"/>
-              </a:rPr>
-              <a:t>The new work redesigns how citizens are served</a:t>
-            </a:r>
-          </a:p>
-        </p:txBody>
-      </p:sp>
-      <p:sp>
-        <p:nvSpPr>
-          <p:cNvPr id="4" name="TextBox 3"/>
-          <p:cNvSpPr txBox="1"/>
-          <p:nvPr/>
-        </p:nvSpPr>
-        <p:spPr>
-          <a:xfrm>
-            <a:off x="658368" y="1417320"/>
-            <a:ext cx="10984687" cy="1569720"/>
-          </a:xfrm>
-          <a:prstGeom prst="rect">
-            <a:avLst/>
-          </a:prstGeom>
-          <a:noFill/>
-        </p:spPr>
-        <p:txBody>
-          <a:bodyPr wrap="square">
-            <a:spAutoFit/>
-          </a:bodyPr>
-          <a:lstStyle/>
-          <a:p>
-            <a:pPr>
-              <a:spcAft>
-                <a:spcPts val="300"/>
-              </a:spcAft>
-            </a:pPr>
-            <a:r>
-              <a:rPr sz="2100" b="1" i="0">
-                <a:solidFill>
-                  <a:srgbClr val="1A1A1A"/>
-                </a:solidFill>
-                <a:latin typeface="Arial"/>
-              </a:rPr>
-              <a:t>One farmer registry</a:t>
-            </a:r>
-          </a:p>
-          <a:p>
-            <a:pPr>
-              <a:spcAft>
-                <a:spcPts val="300"/>
-              </a:spcAft>
-            </a:pPr>
-            <a:r>
-              <a:rPr sz="1600" b="0" i="0">
-                <a:solidFill>
-                  <a:srgbClr val="595959"/>
-                </a:solidFill>
-                <a:latin typeface="Arial"/>
-              </a:rPr>
-              <a:t>Shared by the agriculture ministry, the cooperative bank, the input subsidy programme and the climate-resilience programme — the same farmer, recognised the same way, by all of them.</a:t>
-            </a:r>
-          </a:p>
-        </p:txBody>
-      </p:sp>
-      <p:sp>
-        <p:nvSpPr>
-          <p:cNvPr id="5" name="Rectangle 4"/>
-          <p:cNvSpPr/>
-          <p:nvPr/>
-        </p:nvSpPr>
-        <p:spPr>
-          <a:xfrm>
-            <a:off x="621792" y="2991612"/>
-            <a:ext cx="10881360" cy="12700"/>
-          </a:xfrm>
-          <a:prstGeom prst="rect">
-            <a:avLst/>
-          </a:prstGeom>
-          <a:solidFill>
-            <a:srgbClr val="DDECF4"/>
-          </a:solidFill>
-          <a:ln>
-            <a:noFill/>
-          </a:ln>
-          <a:effectLst/>
-        </p:spPr>
-        <p:style>
-          <a:lnRef idx="1">
-            <a:schemeClr val="accent1"/>
-          </a:lnRef>
-          <a:fillRef idx="3">
-            <a:schemeClr val="accent1"/>
-          </a:fillRef>
-          <a:effectRef idx="2">
-            <a:schemeClr val="accent1"/>
-          </a:effectRef>
-          <a:fontRef idx="minor">
-            <a:schemeClr val="lt1"/>
-          </a:fontRef>
-        </p:style>
-        <p:txBody>
-          <a:bodyPr rtlCol="0" anchor="ctr"/>
-          <a:lstStyle/>
-          <a:p>
-            <a:pPr algn="ctr"/>
-          </a:p>
-        </p:txBody>
-      </p:sp>
-      <p:sp>
-        <p:nvSpPr>
-          <p:cNvPr id="6" name="TextBox 5"/>
-          <p:cNvSpPr txBox="1"/>
-          <p:nvPr/>
-        </p:nvSpPr>
-        <p:spPr>
-          <a:xfrm>
-            <a:off x="658368" y="3032760"/>
-            <a:ext cx="10984687" cy="1569720"/>
-          </a:xfrm>
-          <a:prstGeom prst="rect">
-            <a:avLst/>
-          </a:prstGeom>
-          <a:noFill/>
-        </p:spPr>
-        <p:txBody>
-          <a:bodyPr wrap="square">
-            <a:spAutoFit/>
-          </a:bodyPr>
-          <a:lstStyle/>
-          <a:p>
-            <a:pPr>
-              <a:spcAft>
-                <a:spcPts val="300"/>
-              </a:spcAft>
-            </a:pPr>
-            <a:r>
-              <a:rPr sz="2100" b="1" i="0">
-                <a:solidFill>
-                  <a:srgbClr val="1A1A1A"/>
-                </a:solidFill>
-                <a:latin typeface="Arial"/>
-              </a:rPr>
-              <a:t>One national identity</a:t>
-            </a:r>
-          </a:p>
-          <a:p>
-            <a:pPr>
-              <a:spcAft>
-                <a:spcPts val="300"/>
-              </a:spcAft>
-            </a:pPr>
-            <a:r>
-              <a:rPr sz="1600" b="0" i="0">
-                <a:solidFill>
-                  <a:srgbClr val="595959"/>
-                </a:solidFill>
-                <a:latin typeface="Arial"/>
-              </a:rPr>
-              <a:t>A citizen proves who they are at any service, without paper.</a:t>
-            </a:r>
-          </a:p>
-        </p:txBody>
-      </p:sp>
-      <p:sp>
-        <p:nvSpPr>
-          <p:cNvPr id="7" name="Rectangle 6"/>
-          <p:cNvSpPr/>
-          <p:nvPr/>
-        </p:nvSpPr>
-        <p:spPr>
-          <a:xfrm>
-            <a:off x="621792" y="4607052"/>
-            <a:ext cx="10881360" cy="12700"/>
-          </a:xfrm>
-          <a:prstGeom prst="rect">
-            <a:avLst/>
-          </a:prstGeom>
-          <a:solidFill>
-            <a:srgbClr val="DDECF4"/>
-          </a:solidFill>
-          <a:ln>
-            <a:noFill/>
-          </a:ln>
-          <a:effectLst/>
-        </p:spPr>
-        <p:style>
-          <a:lnRef idx="1">
-            <a:schemeClr val="accent1"/>
-          </a:lnRef>
-          <a:fillRef idx="3">
-            <a:schemeClr val="accent1"/>
-          </a:fillRef>
-          <a:effectRef idx="2">
-            <a:schemeClr val="accent1"/>
-          </a:effectRef>
-          <a:fontRef idx="minor">
-            <a:schemeClr val="lt1"/>
-          </a:fontRef>
-        </p:style>
-        <p:txBody>
-          <a:bodyPr rtlCol="0" anchor="ctr"/>
-          <a:lstStyle/>
-          <a:p>
-            <a:pPr algn="ctr"/>
-          </a:p>
-        </p:txBody>
-      </p:sp>
-      <p:sp>
-        <p:nvSpPr>
-          <p:cNvPr id="8" name="TextBox 7"/>
-          <p:cNvSpPr txBox="1"/>
-          <p:nvPr/>
-        </p:nvSpPr>
-        <p:spPr>
-          <a:xfrm>
-            <a:off x="658368" y="4648200"/>
-            <a:ext cx="10984687" cy="1569720"/>
-          </a:xfrm>
-          <a:prstGeom prst="rect">
-            <a:avLst/>
-          </a:prstGeom>
-          <a:noFill/>
-        </p:spPr>
-        <p:txBody>
-          <a:bodyPr wrap="square">
-            <a:spAutoFit/>
-          </a:bodyPr>
-          <a:lstStyle/>
-          <a:p>
-            <a:pPr>
-              <a:spcAft>
-                <a:spcPts val="300"/>
-              </a:spcAft>
-            </a:pPr>
-            <a:r>
-              <a:rPr sz="2100" b="1" i="0">
-                <a:solidFill>
-                  <a:srgbClr val="1A1A1A"/>
-                </a:solidFill>
-                <a:latin typeface="Arial"/>
-              </a:rPr>
-              <a:t>One learner record</a:t>
-            </a:r>
-          </a:p>
-          <a:p>
-            <a:pPr>
-              <a:spcAft>
-                <a:spcPts val="300"/>
-              </a:spcAft>
-            </a:pPr>
-            <a:r>
-              <a:rPr sz="1600" b="0" i="0">
-                <a:solidFill>
-                  <a:srgbClr val="595959"/>
-                </a:solidFill>
-                <a:latin typeface="Arial"/>
-              </a:rPr>
-              <a:t>It follows the child from primary school to university.</a:t>
-            </a:r>
-          </a:p>
-        </p:txBody>
-      </p:sp>
-      <p:sp>
-        <p:nvSpPr>
-          <p:cNvPr id="9" name="TextBox 8"/>
-          <p:cNvSpPr txBox="1"/>
-          <p:nvPr/>
-        </p:nvSpPr>
-        <p:spPr>
-          <a:xfrm>
-            <a:off x="658368" y="5623560"/>
-            <a:ext cx="10789920" cy="640080"/>
-          </a:xfrm>
-          <a:prstGeom prst="rect">
-            <a:avLst/>
-          </a:prstGeom>
-          <a:noFill/>
-        </p:spPr>
-        <p:txBody>
-          <a:bodyPr wrap="square">
-            <a:spAutoFit/>
-          </a:bodyPr>
-          <a:lstStyle/>
-          <a:p>
-            <a:r>
-              <a:rPr sz="1700" b="1" i="0">
-                <a:solidFill>
-                  <a:srgbClr val="006E96"/>
-                </a:solidFill>
-                <a:latin typeface="Arial"/>
-              </a:rPr>
-              <a:t>None of these is “put it online.” Each is a redesign of how the ministry works.</a:t>
-            </a:r>
-          </a:p>
-        </p:txBody>
-      </p:sp>
-      <p:sp>
-        <p:nvSpPr>
-          <p:cNvPr id="10" name="TextBox 9"/>
-          <p:cNvSpPr txBox="1"/>
-          <p:nvPr/>
-        </p:nvSpPr>
-        <p:spPr>
-          <a:xfrm>
-            <a:off x="457200" y="6473952"/>
-            <a:ext cx="7772400" cy="292608"/>
-          </a:xfrm>
-          <a:prstGeom prst="rect">
-            <a:avLst/>
-          </a:prstGeom>
-          <a:noFill/>
-        </p:spPr>
-        <p:txBody>
-          <a:bodyPr wrap="square">
-            <a:spAutoFit/>
-          </a:bodyPr>
-          <a:lstStyle/>
-          <a:p>
-            <a:r>
-              <a:rPr sz="900" b="0" i="0">
-                <a:solidFill>
-                  <a:srgbClr val="595959"/>
-                </a:solidFill>
-                <a:latin typeface="Arial"/>
-              </a:rPr>
-              <a:t>1.4 · Why an EA matters more now</a:t>
-            </a:r>
-          </a:p>
-        </p:txBody>
-      </p:sp>
-    </p:spTree>
-  </p:cSld>
-  <p:clrMapOvr>
-    <a:masterClrMapping/>
-  </p:clrMapOvr>
-</p:sld>
-</file>
-
 <file path=ppt/slides/slide25.xml><?xml version="1.0" encoding="utf-8"?>
 <p:sld xmlns:a="http://schemas.openxmlformats.org/drawingml/2006/main" xmlns:p="http://schemas.openxmlformats.org/presentationml/2006/main" xmlns:r="http://schemas.openxmlformats.org/officeDocument/2006/relationships">
   <p:cSld>
@@ -13568,58 +11679,14 @@
       <p:grpSpPr/>
       <p:sp>
         <p:nvSpPr>
-          <p:cNvPr id="2" name="Rectangle 1"/>
-          <p:cNvSpPr/>
-          <p:nvPr/>
-        </p:nvSpPr>
-        <p:spPr>
-          <a:xfrm>
-            <a:off x="457200" y="384048"/>
-            <a:ext cx="45720" cy="256032"/>
-          </a:xfrm>
-          <a:prstGeom prst="rect">
-            <a:avLst/>
-          </a:prstGeom>
-          <a:solidFill>
-            <a:srgbClr val="009CD6"/>
-          </a:solidFill>
-          <a:ln>
-            <a:noFill/>
-          </a:ln>
-          <a:effectLst/>
-        </p:spPr>
-        <p:style>
-          <a:lnRef idx="1">
-            <a:schemeClr val="accent1"/>
-          </a:lnRef>
-          <a:fillRef idx="3">
-            <a:schemeClr val="accent1"/>
-          </a:fillRef>
-          <a:effectRef idx="2">
-            <a:schemeClr val="accent1"/>
-          </a:effectRef>
-          <a:fontRef idx="minor">
-            <a:schemeClr val="lt1"/>
-          </a:fontRef>
-        </p:style>
-        <p:txBody>
-          <a:bodyPr rtlCol="0" anchor="ctr"/>
-          <a:lstStyle/>
-          <a:p>
-            <a:pPr algn="ctr"/>
-          </a:p>
-        </p:txBody>
-      </p:sp>
-      <p:sp>
-        <p:nvSpPr>
-          <p:cNvPr id="3" name="TextBox 2"/>
+          <p:cNvPr id="2" name="TextBox 1"/>
           <p:cNvSpPr txBox="1"/>
           <p:nvPr/>
         </p:nvSpPr>
         <p:spPr>
           <a:xfrm>
-            <a:off x="621792" y="274320"/>
-            <a:ext cx="11247120" cy="914400"/>
+            <a:off x="822960" y="822960"/>
+            <a:ext cx="7315200" cy="457200"/>
           </a:xfrm>
           <a:prstGeom prst="rect">
             <a:avLst/>
@@ -13633,27 +11700,95 @@
           <a:lstStyle/>
           <a:p>
             <a:r>
-              <a:rPr sz="2800" b="1" i="0">
+              <a:rPr sz="1200" b="1" i="0">
+                <a:solidFill>
+                  <a:srgbClr val="595959"/>
+                </a:solidFill>
+                <a:latin typeface="Arial"/>
+              </a:rPr>
+              <a:t>KP1 · MODULE 1 · VIDEO 1.4</a:t>
+            </a:r>
+          </a:p>
+        </p:txBody>
+      </p:sp>
+      <p:sp>
+        <p:nvSpPr>
+          <p:cNvPr id="3" name="TextBox 2"/>
+          <p:cNvSpPr txBox="1"/>
+          <p:nvPr/>
+        </p:nvSpPr>
+        <p:spPr>
+          <a:xfrm>
+            <a:off x="822960" y="1828800"/>
+            <a:ext cx="2011680" cy="1097280"/>
+          </a:xfrm>
+          <a:prstGeom prst="rect">
+            <a:avLst/>
+          </a:prstGeom>
+          <a:noFill/>
+        </p:spPr>
+        <p:txBody>
+          <a:bodyPr wrap="square">
+            <a:spAutoFit/>
+          </a:bodyPr>
+          <a:lstStyle/>
+          <a:p>
+            <a:r>
+              <a:rPr sz="6000" b="1" i="0">
+                <a:solidFill>
+                  <a:srgbClr val="009CD6"/>
+                </a:solidFill>
+                <a:latin typeface="Arial"/>
+              </a:rPr>
+              <a:t>1.4</a:t>
+            </a:r>
+          </a:p>
+        </p:txBody>
+      </p:sp>
+      <p:sp>
+        <p:nvSpPr>
+          <p:cNvPr id="4" name="TextBox 3"/>
+          <p:cNvSpPr txBox="1"/>
+          <p:nvPr/>
+        </p:nvSpPr>
+        <p:spPr>
+          <a:xfrm>
+            <a:off x="822960" y="2880360"/>
+            <a:ext cx="9601200" cy="1371600"/>
+          </a:xfrm>
+          <a:prstGeom prst="rect">
+            <a:avLst/>
+          </a:prstGeom>
+          <a:noFill/>
+        </p:spPr>
+        <p:txBody>
+          <a:bodyPr wrap="square">
+            <a:spAutoFit/>
+          </a:bodyPr>
+          <a:lstStyle/>
+          <a:p>
+            <a:r>
+              <a:rPr sz="3400" b="1" i="0">
                 <a:solidFill>
                   <a:srgbClr val="1A1A1A"/>
                 </a:solidFill>
                 <a:latin typeface="Arial"/>
               </a:rPr>
-              <a:t>The new work needs business and IT to decide together</a:t>
-            </a:r>
-          </a:p>
-        </p:txBody>
-      </p:sp>
-      <p:sp>
-        <p:nvSpPr>
-          <p:cNvPr id="4" name="TextBox 3"/>
+              <a:t>Why an EA matters more now</a:t>
+            </a:r>
+          </a:p>
+        </p:txBody>
+      </p:sp>
+      <p:sp>
+        <p:nvSpPr>
+          <p:cNvPr id="5" name="TextBox 4"/>
           <p:cNvSpPr txBox="1"/>
           <p:nvPr/>
         </p:nvSpPr>
         <p:spPr>
           <a:xfrm>
-            <a:off x="658368" y="1828800"/>
-            <a:ext cx="10789920" cy="3931920"/>
+            <a:off x="822960" y="4343400"/>
+            <a:ext cx="9875520" cy="1554480"/>
           </a:xfrm>
           <a:prstGeom prst="rect">
             <a:avLst/>
@@ -13666,99 +11801,28 @@
           </a:bodyPr>
           <a:lstStyle/>
           <a:p>
-            <a:pPr>
-              <a:spcAft>
-                <a:spcPts val="1600"/>
-              </a:spcAft>
-            </a:pPr>
-            <a:r>
-              <a:rPr sz="2200" b="0" i="0">
-                <a:solidFill>
-                  <a:srgbClr val="1A1A1A"/>
-                </a:solidFill>
-                <a:latin typeface="Arial"/>
-              </a:rPr>
-              <a:t>When you redesign how your ministry works, two groups must decide together.</a:t>
-            </a:r>
-          </a:p>
-          <a:p>
-            <a:pPr>
-              <a:spcAft>
-                <a:spcPts val="1600"/>
-              </a:spcAft>
-            </a:pPr>
-            <a:r>
-              <a:rPr sz="2000" b="1" i="0">
-                <a:solidFill>
-                  <a:srgbClr val="1A1A1A"/>
-                </a:solidFill>
-                <a:latin typeface="Arial"/>
-              </a:rPr>
-              <a:t>The business side: </a:t>
-            </a:r>
-            <a:r>
-              <a:rPr sz="2000" b="0" i="0">
-                <a:solidFill>
-                  <a:srgbClr val="1A1A1A"/>
-                </a:solidFill>
-                <a:latin typeface="Arial"/>
-              </a:rPr>
-              <a:t>your minister, your director-general, your head of policy.</a:t>
-            </a:r>
-          </a:p>
-          <a:p>
-            <a:pPr>
-              <a:spcAft>
-                <a:spcPts val="1600"/>
-              </a:spcAft>
-            </a:pPr>
-            <a:r>
-              <a:rPr sz="2000" b="1" i="0">
-                <a:solidFill>
-                  <a:srgbClr val="1A1A1A"/>
-                </a:solidFill>
-                <a:latin typeface="Arial"/>
-              </a:rPr>
-              <a:t>The IT side: </a:t>
-            </a:r>
-            <a:r>
-              <a:rPr sz="2000" b="0" i="0">
-                <a:solidFill>
-                  <a:srgbClr val="1A1A1A"/>
-                </a:solidFill>
-                <a:latin typeface="Arial"/>
-              </a:rPr>
-              <a:t>your architects, your engineers.</a:t>
-            </a:r>
-          </a:p>
-          <a:p>
-            <a:pPr>
-              <a:spcAft>
-                <a:spcPts val="1600"/>
-              </a:spcAft>
-            </a:pPr>
-            <a:r>
-              <a:rPr sz="2000" b="0" i="0">
+            <a:r>
+              <a:rPr sz="1700" b="0" i="1">
                 <a:solidFill>
                   <a:srgbClr val="595959"/>
                 </a:solidFill>
                 <a:latin typeface="Arial"/>
               </a:rPr>
-              <a:t>In the old work, business decided what and IT delivered how. In the new work, they decide together — about the same questions, with the same seriousness.</a:t>
-            </a:r>
-          </a:p>
-        </p:txBody>
-      </p:sp>
-      <p:sp>
-        <p:nvSpPr>
-          <p:cNvPr id="5" name="TextBox 4"/>
+              <a:t>For thirty years, digital work meant putting paper online. That era is ending. The work now is to redesign how your ministry serves citizens — and that work needs business and IT in the same room, using the same words.</a:t>
+            </a:r>
+          </a:p>
+        </p:txBody>
+      </p:sp>
+      <p:sp>
+        <p:nvSpPr>
+          <p:cNvPr id="6" name="TextBox 5"/>
           <p:cNvSpPr txBox="1"/>
           <p:nvPr/>
         </p:nvSpPr>
         <p:spPr>
           <a:xfrm>
-            <a:off x="457200" y="6473952"/>
-            <a:ext cx="7772400" cy="292608"/>
+            <a:off x="822960" y="5989320"/>
+            <a:ext cx="7315200" cy="365760"/>
           </a:xfrm>
           <a:prstGeom prst="rect">
             <a:avLst/>
@@ -13772,13 +11836,13 @@
           <a:lstStyle/>
           <a:p>
             <a:r>
-              <a:rPr sz="900" b="0" i="0">
+              <a:rPr sz="1200" b="0" i="0">
                 <a:solidFill>
                   <a:srgbClr val="595959"/>
                 </a:solidFill>
                 <a:latin typeface="Arial"/>
               </a:rPr>
-              <a:t>1.4 · Why an EA matters more now</a:t>
+              <a:t>standalone video · voice-over on text slides</a:t>
             </a:r>
           </a:p>
         </p:txBody>
@@ -13803,58 +11867,14 @@
       <p:grpSpPr/>
       <p:sp>
         <p:nvSpPr>
-          <p:cNvPr id="2" name="Rectangle 1"/>
-          <p:cNvSpPr/>
-          <p:nvPr/>
-        </p:nvSpPr>
-        <p:spPr>
-          <a:xfrm>
-            <a:off x="457200" y="384048"/>
-            <a:ext cx="45720" cy="256032"/>
-          </a:xfrm>
-          <a:prstGeom prst="rect">
-            <a:avLst/>
-          </a:prstGeom>
-          <a:solidFill>
-            <a:srgbClr val="009CD6"/>
-          </a:solidFill>
-          <a:ln>
-            <a:noFill/>
-          </a:ln>
-          <a:effectLst/>
-        </p:spPr>
-        <p:style>
-          <a:lnRef idx="1">
-            <a:schemeClr val="accent1"/>
-          </a:lnRef>
-          <a:fillRef idx="3">
-            <a:schemeClr val="accent1"/>
-          </a:fillRef>
-          <a:effectRef idx="2">
-            <a:schemeClr val="accent1"/>
-          </a:effectRef>
-          <a:fontRef idx="minor">
-            <a:schemeClr val="lt1"/>
-          </a:fontRef>
-        </p:style>
-        <p:txBody>
-          <a:bodyPr rtlCol="0" anchor="ctr"/>
-          <a:lstStyle/>
-          <a:p>
-            <a:pPr algn="ctr"/>
-          </a:p>
-        </p:txBody>
-      </p:sp>
-      <p:sp>
-        <p:nvSpPr>
-          <p:cNvPr id="3" name="TextBox 2"/>
+          <p:cNvPr id="2" name="TextBox 1"/>
           <p:cNvSpPr txBox="1"/>
           <p:nvPr/>
         </p:nvSpPr>
         <p:spPr>
           <a:xfrm>
-            <a:off x="621792" y="274320"/>
-            <a:ext cx="11247120" cy="914400"/>
+            <a:off x="1005840" y="1325880"/>
+            <a:ext cx="5486400" cy="365760"/>
           </a:xfrm>
           <a:prstGeom prst="rect">
             <a:avLst/>
@@ -13868,73 +11888,61 @@
           <a:lstStyle/>
           <a:p>
             <a:r>
-              <a:rPr sz="2800" b="1" i="0">
+              <a:rPr sz="1200" b="1" i="0">
+                <a:solidFill>
+                  <a:srgbClr val="006E96"/>
+                </a:solidFill>
+                <a:latin typeface="Arial"/>
+              </a:rPr>
+              <a:t>WHERE WE START</a:t>
+            </a:r>
+          </a:p>
+        </p:txBody>
+      </p:sp>
+      <p:sp>
+        <p:nvSpPr>
+          <p:cNvPr id="3" name="TextBox 2"/>
+          <p:cNvSpPr txBox="1"/>
+          <p:nvPr/>
+        </p:nvSpPr>
+        <p:spPr>
+          <a:xfrm>
+            <a:off x="1005840" y="1783080"/>
+            <a:ext cx="10149840" cy="1737360"/>
+          </a:xfrm>
+          <a:prstGeom prst="rect">
+            <a:avLst/>
+          </a:prstGeom>
+          <a:noFill/>
+        </p:spPr>
+        <p:txBody>
+          <a:bodyPr wrap="square">
+            <a:spAutoFit/>
+          </a:bodyPr>
+          <a:lstStyle/>
+          <a:p>
+            <a:r>
+              <a:rPr sz="3000" b="1" i="0">
                 <a:solidFill>
                   <a:srgbClr val="1A1A1A"/>
                 </a:solidFill>
                 <a:latin typeface="Arial"/>
               </a:rPr>
-              <a:t>They sit in the same meeting — and miss each other</a:t>
-            </a:r>
-          </a:p>
-        </p:txBody>
-      </p:sp>
-      <p:sp>
-        <p:nvSpPr>
-          <p:cNvPr id="4" name="Rounded Rectangle 3"/>
-          <p:cNvSpPr/>
-          <p:nvPr/>
-        </p:nvSpPr>
-        <p:spPr>
-          <a:xfrm>
-            <a:off x="658368" y="1645920"/>
-            <a:ext cx="5394960" cy="2194560"/>
-          </a:xfrm>
-          <a:prstGeom prst="roundRect">
-            <a:avLst>
-              <a:gd name="adj" fmla="val 4500"/>
-            </a:avLst>
-          </a:prstGeom>
-          <a:solidFill>
-            <a:srgbClr val="E5F5FB"/>
-          </a:solidFill>
-          <a:ln>
-            <a:noFill/>
-          </a:ln>
-          <a:effectLst/>
-        </p:spPr>
-        <p:style>
-          <a:lnRef idx="1">
-            <a:schemeClr val="accent1"/>
-          </a:lnRef>
-          <a:fillRef idx="3">
-            <a:schemeClr val="accent1"/>
-          </a:fillRef>
-          <a:effectRef idx="2">
-            <a:schemeClr val="accent1"/>
-          </a:effectRef>
-          <a:fontRef idx="minor">
-            <a:schemeClr val="lt1"/>
-          </a:fontRef>
-        </p:style>
-        <p:txBody>
-          <a:bodyPr rtlCol="0" anchor="ctr"/>
-          <a:lstStyle/>
-          <a:p>
-            <a:pPr algn="ctr"/>
-          </a:p>
-        </p:txBody>
-      </p:sp>
-      <p:sp>
-        <p:nvSpPr>
-          <p:cNvPr id="5" name="TextBox 4"/>
+              <a:t>Putting paper online was the work. It is not any more.</a:t>
+            </a:r>
+          </a:p>
+        </p:txBody>
+      </p:sp>
+      <p:sp>
+        <p:nvSpPr>
+          <p:cNvPr id="4" name="TextBox 3"/>
           <p:cNvSpPr txBox="1"/>
           <p:nvPr/>
         </p:nvSpPr>
         <p:spPr>
           <a:xfrm>
-            <a:off x="859536" y="1792224"/>
-            <a:ext cx="4992624" cy="1920240"/>
+            <a:off x="1005840" y="3611880"/>
+            <a:ext cx="10149840" cy="2377440"/>
           </a:xfrm>
           <a:prstGeom prst="rect">
             <a:avLst/>
@@ -13949,179 +11957,7 @@
           <a:p>
             <a:pPr>
               <a:spcAft>
-                <a:spcPts val="700"/>
-              </a:spcAft>
-            </a:pPr>
-            <a:r>
-              <a:rPr sz="1500" b="0" i="0">
-                <a:solidFill>
-                  <a:srgbClr val="595959"/>
-                </a:solidFill>
-                <a:latin typeface="Arial"/>
-              </a:rPr>
-              <a:t>Your minister talks about</a:t>
-            </a:r>
-          </a:p>
-          <a:p>
-            <a:pPr>
-              <a:spcAft>
-                <a:spcPts val="700"/>
-              </a:spcAft>
-            </a:pPr>
-            <a:r>
-              <a:rPr sz="2000" b="1" i="0">
-                <a:solidFill>
-                  <a:srgbClr val="1A1A1A"/>
-                </a:solidFill>
-                <a:latin typeface="Arial"/>
-              </a:rPr>
-              <a:t>citizen services and policy goals</a:t>
-            </a:r>
-          </a:p>
-        </p:txBody>
-      </p:sp>
-      <p:sp>
-        <p:nvSpPr>
-          <p:cNvPr id="6" name="Rounded Rectangle 5"/>
-          <p:cNvSpPr/>
-          <p:nvPr/>
-        </p:nvSpPr>
-        <p:spPr>
-          <a:xfrm>
-            <a:off x="6281928" y="1645920"/>
-            <a:ext cx="5394960" cy="2194560"/>
-          </a:xfrm>
-          <a:prstGeom prst="roundRect">
-            <a:avLst>
-              <a:gd name="adj" fmla="val 4500"/>
-            </a:avLst>
-          </a:prstGeom>
-          <a:solidFill>
-            <a:srgbClr val="E5F5FB"/>
-          </a:solidFill>
-          <a:ln>
-            <a:noFill/>
-          </a:ln>
-          <a:effectLst/>
-        </p:spPr>
-        <p:style>
-          <a:lnRef idx="1">
-            <a:schemeClr val="accent1"/>
-          </a:lnRef>
-          <a:fillRef idx="3">
-            <a:schemeClr val="accent1"/>
-          </a:fillRef>
-          <a:effectRef idx="2">
-            <a:schemeClr val="accent1"/>
-          </a:effectRef>
-          <a:fontRef idx="minor">
-            <a:schemeClr val="lt1"/>
-          </a:fontRef>
-        </p:style>
-        <p:txBody>
-          <a:bodyPr rtlCol="0" anchor="ctr"/>
-          <a:lstStyle/>
-          <a:p>
-            <a:pPr algn="ctr"/>
-          </a:p>
-        </p:txBody>
-      </p:sp>
-      <p:sp>
-        <p:nvSpPr>
-          <p:cNvPr id="7" name="TextBox 6"/>
-          <p:cNvSpPr txBox="1"/>
-          <p:nvPr/>
-        </p:nvSpPr>
-        <p:spPr>
-          <a:xfrm>
-            <a:off x="6483096" y="1792224"/>
-            <a:ext cx="4992624" cy="1920240"/>
-          </a:xfrm>
-          <a:prstGeom prst="rect">
-            <a:avLst/>
-          </a:prstGeom>
-          <a:noFill/>
-        </p:spPr>
-        <p:txBody>
-          <a:bodyPr wrap="square">
-            <a:spAutoFit/>
-          </a:bodyPr>
-          <a:lstStyle/>
-          <a:p>
-            <a:pPr>
-              <a:spcAft>
-                <a:spcPts val="700"/>
-              </a:spcAft>
-            </a:pPr>
-            <a:r>
-              <a:rPr sz="1500" b="0" i="0">
-                <a:solidFill>
-                  <a:srgbClr val="595959"/>
-                </a:solidFill>
-                <a:latin typeface="Arial"/>
-              </a:rPr>
-              <a:t>Your chief architect talks about</a:t>
-            </a:r>
-          </a:p>
-          <a:p>
-            <a:pPr>
-              <a:spcAft>
-                <a:spcPts val="700"/>
-              </a:spcAft>
-            </a:pPr>
-            <a:r>
-              <a:rPr sz="2000" b="1" i="0">
-                <a:solidFill>
-                  <a:srgbClr val="1A1A1A"/>
-                </a:solidFill>
-                <a:latin typeface="Arial"/>
-              </a:rPr>
-              <a:t>systems, APIs and data</a:t>
-            </a:r>
-          </a:p>
-        </p:txBody>
-      </p:sp>
-      <p:sp>
-        <p:nvSpPr>
-          <p:cNvPr id="8" name="TextBox 7"/>
-          <p:cNvSpPr txBox="1"/>
-          <p:nvPr/>
-        </p:nvSpPr>
-        <p:spPr>
-          <a:xfrm>
-            <a:off x="658368" y="4297680"/>
-            <a:ext cx="10789920" cy="1645920"/>
-          </a:xfrm>
-          <a:prstGeom prst="rect">
-            <a:avLst/>
-          </a:prstGeom>
-          <a:noFill/>
-        </p:spPr>
-        <p:txBody>
-          <a:bodyPr wrap="square">
-            <a:spAutoFit/>
-          </a:bodyPr>
-          <a:lstStyle/>
-          <a:p>
-            <a:pPr>
-              <a:spcAft>
-                <a:spcPts val="1000"/>
-              </a:spcAft>
-            </a:pPr>
-            <a:r>
-              <a:rPr sz="2100" b="1" i="0">
-                <a:solidFill>
-                  <a:srgbClr val="1A1A1A"/>
-                </a:solidFill>
-                <a:latin typeface="Arial"/>
-              </a:rPr>
-              <a:t>The decision does not get made well — or it does not get made at all.</a:t>
-            </a:r>
-          </a:p>
-          <a:p>
-            <a:pPr>
-              <a:spcAft>
-                <a:spcPts val="1000"/>
+                <a:spcPts val="800"/>
               </a:spcAft>
             </a:pPr>
             <a:r>
@@ -14131,14 +11967,30 @@
                 </a:solidFill>
                 <a:latin typeface="Arial"/>
               </a:rPr>
-              <a:t>And the ministry stays in the old work, even though the new work is what is needed.</a:t>
-            </a:r>
-          </a:p>
-        </p:txBody>
-      </p:sp>
-      <p:sp>
-        <p:nvSpPr>
-          <p:cNvPr id="9" name="TextBox 8"/>
+              <a:t>The form became a web form, the queue an online appointment, the certificate a PDF.</a:t>
+            </a:r>
+          </a:p>
+          <a:p>
+            <a:pPr>
+              <a:spcAft>
+                <a:spcPts val="800"/>
+              </a:spcAft>
+            </a:pPr>
+            <a:r>
+              <a:rPr sz="1700" b="0" i="0">
+                <a:solidFill>
+                  <a:srgbClr val="595959"/>
+                </a:solidFill>
+                <a:latin typeface="Arial"/>
+              </a:rPr>
+              <a:t>The ministry still did the same work — only the medium changed.</a:t>
+            </a:r>
+          </a:p>
+        </p:txBody>
+      </p:sp>
+      <p:sp>
+        <p:nvSpPr>
+          <p:cNvPr id="5" name="TextBox 4"/>
           <p:cNvSpPr txBox="1"/>
           <p:nvPr/>
         </p:nvSpPr>
@@ -14166,6 +12018,41 @@
                 <a:latin typeface="Arial"/>
               </a:rPr>
               <a:t>1.4 · Why an EA matters more now</a:t>
+            </a:r>
+          </a:p>
+        </p:txBody>
+      </p:sp>
+      <p:sp>
+        <p:nvSpPr>
+          <p:cNvPr id="6" name="TextBox 5"/>
+          <p:cNvSpPr txBox="1"/>
+          <p:nvPr/>
+        </p:nvSpPr>
+        <p:spPr>
+          <a:xfrm>
+            <a:off x="10058400" y="6473952"/>
+            <a:ext cx="1673352" cy="292608"/>
+          </a:xfrm>
+          <a:prstGeom prst="rect">
+            <a:avLst/>
+          </a:prstGeom>
+          <a:noFill/>
+        </p:spPr>
+        <p:txBody>
+          <a:bodyPr wrap="square">
+            <a:spAutoFit/>
+          </a:bodyPr>
+          <a:lstStyle/>
+          <a:p>
+            <a:pPr algn="r"/>
+            <a:r>
+              <a:rPr sz="900" b="0" i="0">
+                <a:solidFill>
+                  <a:srgbClr val="595959"/>
+                </a:solidFill>
+                <a:latin typeface="Arial"/>
+              </a:rPr>
+              <a:t>www.itu.int</a:t>
             </a:r>
           </a:p>
         </p:txBody>
@@ -14261,27 +12148,29 @@
                 </a:solidFill>
                 <a:latin typeface="Arial"/>
               </a:rPr>
-              <a:t>An EA gives both sides one language</a:t>
-            </a:r>
-          </a:p>
-        </p:txBody>
-      </p:sp>
-      <p:sp>
-        <p:nvSpPr>
-          <p:cNvPr id="4" name="Oval 3"/>
+              <a:t>Putting paper online is no longer the main work</a:t>
+            </a:r>
+          </a:p>
+        </p:txBody>
+      </p:sp>
+      <p:sp>
+        <p:nvSpPr>
+          <p:cNvPr id="4" name="Rounded Rectangle 3"/>
           <p:cNvSpPr/>
           <p:nvPr/>
         </p:nvSpPr>
         <p:spPr>
           <a:xfrm>
-            <a:off x="621792" y="1463040"/>
-            <a:ext cx="310896" cy="310896"/>
-          </a:xfrm>
-          <a:prstGeom prst="ellipse">
-            <a:avLst/>
+            <a:off x="658368" y="1554480"/>
+            <a:ext cx="5394960" cy="4206240"/>
+          </a:xfrm>
+          <a:prstGeom prst="roundRect">
+            <a:avLst>
+              <a:gd name="adj" fmla="val 4500"/>
+            </a:avLst>
           </a:prstGeom>
           <a:solidFill>
-            <a:srgbClr val="009CD6"/>
+            <a:srgbClr val="F2F2F2"/>
           </a:solidFill>
           <a:ln>
             <a:noFill/>
@@ -14303,19 +12192,10 @@
           </a:fontRef>
         </p:style>
         <p:txBody>
-          <a:bodyPr rtlCol="0" anchor="ctr" lIns="0" rIns="0" tIns="0" bIns="0" wrap="square"/>
+          <a:bodyPr rtlCol="0" anchor="ctr"/>
           <a:lstStyle/>
           <a:p>
             <a:pPr algn="ctr"/>
-            <a:r>
-              <a:rPr sz="1300" b="1" i="0">
-                <a:solidFill>
-                  <a:srgbClr val="FFFFFF"/>
-                </a:solidFill>
-                <a:latin typeface="Arial"/>
-              </a:rPr>
-              <a:t>1</a:t>
-            </a:r>
           </a:p>
         </p:txBody>
       </p:sp>
@@ -14327,8 +12207,8 @@
         </p:nvSpPr>
         <p:spPr>
           <a:xfrm>
-            <a:off x="1115568" y="1417320"/>
-            <a:ext cx="10527487" cy="1569720"/>
+            <a:off x="859536" y="1700784"/>
+            <a:ext cx="4992624" cy="3931920"/>
           </a:xfrm>
           <a:prstGeom prst="rect">
             <a:avLst/>
@@ -14343,53 +12223,87 @@
           <a:p>
             <a:pPr>
               <a:spcAft>
-                <a:spcPts val="300"/>
+                <a:spcPts val="700"/>
               </a:spcAft>
             </a:pPr>
             <a:r>
-              <a:rPr sz="2100" b="1" i="0">
+              <a:rPr sz="1900" b="1" i="0">
+                <a:solidFill>
+                  <a:srgbClr val="595959"/>
+                </a:solidFill>
+                <a:latin typeface="Arial"/>
+              </a:rPr>
+              <a:t>The old work</a:t>
+            </a:r>
+          </a:p>
+          <a:p>
+            <a:pPr>
+              <a:spcAft>
+                <a:spcPts val="700"/>
+              </a:spcAft>
+            </a:pPr>
+            <a:r>
+              <a:rPr sz="1600" b="0" i="0">
                 <a:solidFill>
                   <a:srgbClr val="1A1A1A"/>
                 </a:solidFill>
                 <a:latin typeface="Arial"/>
               </a:rPr>
-              <a:t>The agreed picture</a:t>
+              <a:t>Take a paper process and put it online</a:t>
             </a:r>
           </a:p>
           <a:p>
             <a:pPr>
               <a:spcAft>
-                <a:spcPts val="300"/>
+                <a:spcPts val="700"/>
               </a:spcAft>
             </a:pPr>
             <a:r>
               <a:rPr sz="1600" b="0" i="0">
                 <a:solidFill>
-                  <a:srgbClr val="595959"/>
+                  <a:srgbClr val="1A1A1A"/>
                 </a:solidFill>
                 <a:latin typeface="Arial"/>
               </a:rPr>
-              <a:t>Something both sides can point at.</a:t>
-            </a:r>
-          </a:p>
-        </p:txBody>
-      </p:sp>
-      <p:sp>
-        <p:nvSpPr>
-          <p:cNvPr id="6" name="Rectangle 5"/>
+              <a:t>The ministry’s operating model stays the same</a:t>
+            </a:r>
+          </a:p>
+          <a:p>
+            <a:pPr>
+              <a:spcAft>
+                <a:spcPts val="700"/>
+              </a:spcAft>
+            </a:pPr>
+            <a:r>
+              <a:rPr sz="1600" b="0" i="0">
+                <a:solidFill>
+                  <a:srgbClr val="1A1A1A"/>
+                </a:solidFill>
+                <a:latin typeface="Arial"/>
+              </a:rPr>
+              <a:t>Business decides what; IT delivers how</a:t>
+            </a:r>
+          </a:p>
+        </p:txBody>
+      </p:sp>
+      <p:sp>
+        <p:nvSpPr>
+          <p:cNvPr id="6" name="Rounded Rectangle 5"/>
           <p:cNvSpPr/>
           <p:nvPr/>
         </p:nvSpPr>
         <p:spPr>
           <a:xfrm>
-            <a:off x="621792" y="2991612"/>
-            <a:ext cx="10881360" cy="12700"/>
-          </a:xfrm>
-          <a:prstGeom prst="rect">
-            <a:avLst/>
+            <a:off x="6281928" y="1554480"/>
+            <a:ext cx="5394960" cy="4206240"/>
+          </a:xfrm>
+          <a:prstGeom prst="roundRect">
+            <a:avLst>
+              <a:gd name="adj" fmla="val 4500"/>
+            </a:avLst>
           </a:prstGeom>
           <a:solidFill>
-            <a:srgbClr val="DDECF4"/>
+            <a:srgbClr val="E5F5FB"/>
           </a:solidFill>
           <a:ln>
             <a:noFill/>
@@ -14420,67 +12334,14 @@
       </p:sp>
       <p:sp>
         <p:nvSpPr>
-          <p:cNvPr id="7" name="Oval 6"/>
-          <p:cNvSpPr/>
-          <p:nvPr/>
-        </p:nvSpPr>
-        <p:spPr>
-          <a:xfrm>
-            <a:off x="621792" y="3078479"/>
-            <a:ext cx="310896" cy="310896"/>
-          </a:xfrm>
-          <a:prstGeom prst="ellipse">
-            <a:avLst/>
-          </a:prstGeom>
-          <a:solidFill>
-            <a:srgbClr val="009CD6"/>
-          </a:solidFill>
-          <a:ln>
-            <a:noFill/>
-          </a:ln>
-          <a:effectLst/>
-        </p:spPr>
-        <p:style>
-          <a:lnRef idx="1">
-            <a:schemeClr val="accent1"/>
-          </a:lnRef>
-          <a:fillRef idx="3">
-            <a:schemeClr val="accent1"/>
-          </a:fillRef>
-          <a:effectRef idx="2">
-            <a:schemeClr val="accent1"/>
-          </a:effectRef>
-          <a:fontRef idx="minor">
-            <a:schemeClr val="lt1"/>
-          </a:fontRef>
-        </p:style>
-        <p:txBody>
-          <a:bodyPr rtlCol="0" anchor="ctr" lIns="0" rIns="0" tIns="0" bIns="0" wrap="square"/>
-          <a:lstStyle/>
-          <a:p>
-            <a:pPr algn="ctr"/>
-            <a:r>
-              <a:rPr sz="1300" b="1" i="0">
-                <a:solidFill>
-                  <a:srgbClr val="FFFFFF"/>
-                </a:solidFill>
-                <a:latin typeface="Arial"/>
-              </a:rPr>
-              <a:t>2</a:t>
-            </a:r>
-          </a:p>
-        </p:txBody>
-      </p:sp>
-      <p:sp>
-        <p:nvSpPr>
-          <p:cNvPr id="8" name="TextBox 7"/>
+          <p:cNvPr id="7" name="TextBox 6"/>
           <p:cNvSpPr txBox="1"/>
           <p:nvPr/>
         </p:nvSpPr>
         <p:spPr>
           <a:xfrm>
-            <a:off x="1115568" y="3032760"/>
-            <a:ext cx="10527487" cy="1569720"/>
+            <a:off x="6483096" y="1700784"/>
+            <a:ext cx="4992624" cy="3931920"/>
           </a:xfrm>
           <a:prstGeom prst="rect">
             <a:avLst/>
@@ -14495,226 +12356,72 @@
           <a:p>
             <a:pPr>
               <a:spcAft>
-                <a:spcPts val="300"/>
+                <a:spcPts val="700"/>
               </a:spcAft>
             </a:pPr>
             <a:r>
-              <a:rPr sz="2100" b="1" i="0">
+              <a:rPr sz="1900" b="1" i="0">
+                <a:solidFill>
+                  <a:srgbClr val="006E96"/>
+                </a:solidFill>
+                <a:latin typeface="Arial"/>
+              </a:rPr>
+              <a:t>The new work</a:t>
+            </a:r>
+          </a:p>
+          <a:p>
+            <a:pPr>
+              <a:spcAft>
+                <a:spcPts val="700"/>
+              </a:spcAft>
+            </a:pPr>
+            <a:r>
+              <a:rPr sz="1600" b="0" i="0">
                 <a:solidFill>
                   <a:srgbClr val="1A1A1A"/>
                 </a:solidFill>
                 <a:latin typeface="Arial"/>
               </a:rPr>
-              <a:t>Plain words for the basic terms</a:t>
+              <a:t>Redesign how citizens are served</a:t>
             </a:r>
           </a:p>
           <a:p>
             <a:pPr>
               <a:spcAft>
-                <a:spcPts val="300"/>
+                <a:spcPts val="700"/>
               </a:spcAft>
             </a:pPr>
             <a:r>
               <a:rPr sz="1600" b="0" i="0">
-                <a:solidFill>
-                  <a:srgbClr val="595959"/>
-                </a:solidFill>
-                <a:latin typeface="Arial"/>
-              </a:rPr>
-              <a:t>Service, capability, data domain — meaning the same thing to both sides.</a:t>
-            </a:r>
-          </a:p>
-        </p:txBody>
-      </p:sp>
-      <p:sp>
-        <p:nvSpPr>
-          <p:cNvPr id="9" name="Rectangle 8"/>
-          <p:cNvSpPr/>
-          <p:nvPr/>
-        </p:nvSpPr>
-        <p:spPr>
-          <a:xfrm>
-            <a:off x="621792" y="4607052"/>
-            <a:ext cx="10881360" cy="12700"/>
-          </a:xfrm>
-          <a:prstGeom prst="rect">
-            <a:avLst/>
-          </a:prstGeom>
-          <a:solidFill>
-            <a:srgbClr val="DDECF4"/>
-          </a:solidFill>
-          <a:ln>
-            <a:noFill/>
-          </a:ln>
-          <a:effectLst/>
-        </p:spPr>
-        <p:style>
-          <a:lnRef idx="1">
-            <a:schemeClr val="accent1"/>
-          </a:lnRef>
-          <a:fillRef idx="3">
-            <a:schemeClr val="accent1"/>
-          </a:fillRef>
-          <a:effectRef idx="2">
-            <a:schemeClr val="accent1"/>
-          </a:effectRef>
-          <a:fontRef idx="minor">
-            <a:schemeClr val="lt1"/>
-          </a:fontRef>
-        </p:style>
-        <p:txBody>
-          <a:bodyPr rtlCol="0" anchor="ctr"/>
-          <a:lstStyle/>
-          <a:p>
-            <a:pPr algn="ctr"/>
-          </a:p>
-        </p:txBody>
-      </p:sp>
-      <p:sp>
-        <p:nvSpPr>
-          <p:cNvPr id="10" name="Oval 9"/>
-          <p:cNvSpPr/>
-          <p:nvPr/>
-        </p:nvSpPr>
-        <p:spPr>
-          <a:xfrm>
-            <a:off x="621792" y="4693920"/>
-            <a:ext cx="310896" cy="310896"/>
-          </a:xfrm>
-          <a:prstGeom prst="ellipse">
-            <a:avLst/>
-          </a:prstGeom>
-          <a:solidFill>
-            <a:srgbClr val="009CD6"/>
-          </a:solidFill>
-          <a:ln>
-            <a:noFill/>
-          </a:ln>
-          <a:effectLst/>
-        </p:spPr>
-        <p:style>
-          <a:lnRef idx="1">
-            <a:schemeClr val="accent1"/>
-          </a:lnRef>
-          <a:fillRef idx="3">
-            <a:schemeClr val="accent1"/>
-          </a:fillRef>
-          <a:effectRef idx="2">
-            <a:schemeClr val="accent1"/>
-          </a:effectRef>
-          <a:fontRef idx="minor">
-            <a:schemeClr val="lt1"/>
-          </a:fontRef>
-        </p:style>
-        <p:txBody>
-          <a:bodyPr rtlCol="0" anchor="ctr" lIns="0" rIns="0" tIns="0" bIns="0" wrap="square"/>
-          <a:lstStyle/>
-          <a:p>
-            <a:pPr algn="ctr"/>
-            <a:r>
-              <a:rPr sz="1300" b="1" i="0">
-                <a:solidFill>
-                  <a:srgbClr val="FFFFFF"/>
-                </a:solidFill>
-                <a:latin typeface="Arial"/>
-              </a:rPr>
-              <a:t>3</a:t>
-            </a:r>
-          </a:p>
-        </p:txBody>
-      </p:sp>
-      <p:sp>
-        <p:nvSpPr>
-          <p:cNvPr id="11" name="TextBox 10"/>
-          <p:cNvSpPr txBox="1"/>
-          <p:nvPr/>
-        </p:nvSpPr>
-        <p:spPr>
-          <a:xfrm>
-            <a:off x="1115568" y="4648200"/>
-            <a:ext cx="10527487" cy="1569720"/>
-          </a:xfrm>
-          <a:prstGeom prst="rect">
-            <a:avLst/>
-          </a:prstGeom>
-          <a:noFill/>
-        </p:spPr>
-        <p:txBody>
-          <a:bodyPr wrap="square">
-            <a:spAutoFit/>
-          </a:bodyPr>
-          <a:lstStyle/>
-          <a:p>
-            <a:pPr>
-              <a:spcAft>
-                <a:spcPts val="300"/>
-              </a:spcAft>
-            </a:pPr>
-            <a:r>
-              <a:rPr sz="2100" b="1" i="0">
                 <a:solidFill>
                   <a:srgbClr val="1A1A1A"/>
                 </a:solidFill>
                 <a:latin typeface="Arial"/>
               </a:rPr>
-              <a:t>A regular forum — the EA Board</a:t>
+              <a:t>The ministry’s operating model changes</a:t>
             </a:r>
           </a:p>
           <a:p>
             <a:pPr>
               <a:spcAft>
-                <a:spcPts val="300"/>
+                <a:spcPts val="700"/>
               </a:spcAft>
             </a:pPr>
             <a:r>
-              <a:rPr sz="1600" b="0" i="0">
+              <a:rPr sz="1600" b="1" i="0">
                 <a:solidFill>
-                  <a:srgbClr val="595959"/>
+                  <a:srgbClr val="1A1A1A"/>
                 </a:solidFill>
                 <a:latin typeface="Arial"/>
               </a:rPr>
-              <a:t>Where business and IT sit together and decide.</a:t>
-            </a:r>
-          </a:p>
-        </p:txBody>
-      </p:sp>
-      <p:sp>
-        <p:nvSpPr>
-          <p:cNvPr id="12" name="TextBox 11"/>
-          <p:cNvSpPr txBox="1"/>
-          <p:nvPr/>
-        </p:nvSpPr>
-        <p:spPr>
-          <a:xfrm>
-            <a:off x="658368" y="5669280"/>
-            <a:ext cx="10789920" cy="640080"/>
-          </a:xfrm>
-          <a:prstGeom prst="rect">
-            <a:avLst/>
-          </a:prstGeom>
-          <a:noFill/>
-        </p:spPr>
-        <p:txBody>
-          <a:bodyPr wrap="square">
-            <a:spAutoFit/>
-          </a:bodyPr>
-          <a:lstStyle/>
-          <a:p>
-            <a:r>
-              <a:rPr sz="1600" b="0" i="1">
-                <a:solidFill>
-                  <a:srgbClr val="595959"/>
-                </a:solidFill>
-                <a:latin typeface="Arial"/>
-              </a:rPr>
-              <a:t>With these in place, the redesign conversation finally happens. Without them, it does not.</a:t>
-            </a:r>
-          </a:p>
-        </p:txBody>
-      </p:sp>
-      <p:sp>
-        <p:nvSpPr>
-          <p:cNvPr id="13" name="TextBox 12"/>
+              <a:t>Business and IT decide together</a:t>
+            </a:r>
+          </a:p>
+        </p:txBody>
+      </p:sp>
+      <p:sp>
+        <p:nvSpPr>
+          <p:cNvPr id="8" name="TextBox 7"/>
           <p:cNvSpPr txBox="1"/>
           <p:nvPr/>
         </p:nvSpPr>
@@ -14766,6 +12473,1621 @@
       <p:grpSpPr/>
       <p:sp>
         <p:nvSpPr>
+          <p:cNvPr id="2" name="Rectangle 1"/>
+          <p:cNvSpPr/>
+          <p:nvPr/>
+        </p:nvSpPr>
+        <p:spPr>
+          <a:xfrm>
+            <a:off x="457200" y="384048"/>
+            <a:ext cx="45720" cy="256032"/>
+          </a:xfrm>
+          <a:prstGeom prst="rect">
+            <a:avLst/>
+          </a:prstGeom>
+          <a:solidFill>
+            <a:srgbClr val="009CD6"/>
+          </a:solidFill>
+          <a:ln>
+            <a:noFill/>
+          </a:ln>
+          <a:effectLst/>
+        </p:spPr>
+        <p:style>
+          <a:lnRef idx="1">
+            <a:schemeClr val="accent1"/>
+          </a:lnRef>
+          <a:fillRef idx="3">
+            <a:schemeClr val="accent1"/>
+          </a:fillRef>
+          <a:effectRef idx="2">
+            <a:schemeClr val="accent1"/>
+          </a:effectRef>
+          <a:fontRef idx="minor">
+            <a:schemeClr val="lt1"/>
+          </a:fontRef>
+        </p:style>
+        <p:txBody>
+          <a:bodyPr rtlCol="0" anchor="ctr"/>
+          <a:lstStyle/>
+          <a:p>
+            <a:pPr algn="ctr"/>
+          </a:p>
+        </p:txBody>
+      </p:sp>
+      <p:sp>
+        <p:nvSpPr>
+          <p:cNvPr id="3" name="TextBox 2"/>
+          <p:cNvSpPr txBox="1"/>
+          <p:nvPr/>
+        </p:nvSpPr>
+        <p:spPr>
+          <a:xfrm>
+            <a:off x="621792" y="274320"/>
+            <a:ext cx="11247120" cy="914400"/>
+          </a:xfrm>
+          <a:prstGeom prst="rect">
+            <a:avLst/>
+          </a:prstGeom>
+          <a:noFill/>
+        </p:spPr>
+        <p:txBody>
+          <a:bodyPr wrap="square">
+            <a:spAutoFit/>
+          </a:bodyPr>
+          <a:lstStyle/>
+          <a:p>
+            <a:r>
+              <a:rPr sz="2800" b="1" i="0">
+                <a:solidFill>
+                  <a:srgbClr val="1A1A1A"/>
+                </a:solidFill>
+                <a:latin typeface="Arial"/>
+              </a:rPr>
+              <a:t>The new work redesigns how citizens are served</a:t>
+            </a:r>
+          </a:p>
+        </p:txBody>
+      </p:sp>
+      <p:sp>
+        <p:nvSpPr>
+          <p:cNvPr id="4" name="TextBox 3"/>
+          <p:cNvSpPr txBox="1"/>
+          <p:nvPr/>
+        </p:nvSpPr>
+        <p:spPr>
+          <a:xfrm>
+            <a:off x="658368" y="1417320"/>
+            <a:ext cx="10984687" cy="1569720"/>
+          </a:xfrm>
+          <a:prstGeom prst="rect">
+            <a:avLst/>
+          </a:prstGeom>
+          <a:noFill/>
+        </p:spPr>
+        <p:txBody>
+          <a:bodyPr wrap="square">
+            <a:spAutoFit/>
+          </a:bodyPr>
+          <a:lstStyle/>
+          <a:p>
+            <a:pPr>
+              <a:spcAft>
+                <a:spcPts val="300"/>
+              </a:spcAft>
+            </a:pPr>
+            <a:r>
+              <a:rPr sz="2100" b="1" i="0">
+                <a:solidFill>
+                  <a:srgbClr val="1A1A1A"/>
+                </a:solidFill>
+                <a:latin typeface="Arial"/>
+              </a:rPr>
+              <a:t>One farmer registry</a:t>
+            </a:r>
+          </a:p>
+          <a:p>
+            <a:pPr>
+              <a:spcAft>
+                <a:spcPts val="300"/>
+              </a:spcAft>
+            </a:pPr>
+            <a:r>
+              <a:rPr sz="1600" b="0" i="0">
+                <a:solidFill>
+                  <a:srgbClr val="595959"/>
+                </a:solidFill>
+                <a:latin typeface="Arial"/>
+              </a:rPr>
+              <a:t>Shared by the agriculture ministry, the cooperative bank, the input subsidy programme and the climate-resilience programme — the same farmer, recognised the same way, by all of them.</a:t>
+            </a:r>
+          </a:p>
+        </p:txBody>
+      </p:sp>
+      <p:sp>
+        <p:nvSpPr>
+          <p:cNvPr id="5" name="Rectangle 4"/>
+          <p:cNvSpPr/>
+          <p:nvPr/>
+        </p:nvSpPr>
+        <p:spPr>
+          <a:xfrm>
+            <a:off x="621792" y="2991612"/>
+            <a:ext cx="10881360" cy="12700"/>
+          </a:xfrm>
+          <a:prstGeom prst="rect">
+            <a:avLst/>
+          </a:prstGeom>
+          <a:solidFill>
+            <a:srgbClr val="DDECF4"/>
+          </a:solidFill>
+          <a:ln>
+            <a:noFill/>
+          </a:ln>
+          <a:effectLst/>
+        </p:spPr>
+        <p:style>
+          <a:lnRef idx="1">
+            <a:schemeClr val="accent1"/>
+          </a:lnRef>
+          <a:fillRef idx="3">
+            <a:schemeClr val="accent1"/>
+          </a:fillRef>
+          <a:effectRef idx="2">
+            <a:schemeClr val="accent1"/>
+          </a:effectRef>
+          <a:fontRef idx="minor">
+            <a:schemeClr val="lt1"/>
+          </a:fontRef>
+        </p:style>
+        <p:txBody>
+          <a:bodyPr rtlCol="0" anchor="ctr"/>
+          <a:lstStyle/>
+          <a:p>
+            <a:pPr algn="ctr"/>
+          </a:p>
+        </p:txBody>
+      </p:sp>
+      <p:sp>
+        <p:nvSpPr>
+          <p:cNvPr id="6" name="TextBox 5"/>
+          <p:cNvSpPr txBox="1"/>
+          <p:nvPr/>
+        </p:nvSpPr>
+        <p:spPr>
+          <a:xfrm>
+            <a:off x="658368" y="3032760"/>
+            <a:ext cx="10984687" cy="1569720"/>
+          </a:xfrm>
+          <a:prstGeom prst="rect">
+            <a:avLst/>
+          </a:prstGeom>
+          <a:noFill/>
+        </p:spPr>
+        <p:txBody>
+          <a:bodyPr wrap="square">
+            <a:spAutoFit/>
+          </a:bodyPr>
+          <a:lstStyle/>
+          <a:p>
+            <a:pPr>
+              <a:spcAft>
+                <a:spcPts val="300"/>
+              </a:spcAft>
+            </a:pPr>
+            <a:r>
+              <a:rPr sz="2100" b="1" i="0">
+                <a:solidFill>
+                  <a:srgbClr val="1A1A1A"/>
+                </a:solidFill>
+                <a:latin typeface="Arial"/>
+              </a:rPr>
+              <a:t>One national identity</a:t>
+            </a:r>
+          </a:p>
+          <a:p>
+            <a:pPr>
+              <a:spcAft>
+                <a:spcPts val="300"/>
+              </a:spcAft>
+            </a:pPr>
+            <a:r>
+              <a:rPr sz="1600" b="0" i="0">
+                <a:solidFill>
+                  <a:srgbClr val="595959"/>
+                </a:solidFill>
+                <a:latin typeface="Arial"/>
+              </a:rPr>
+              <a:t>A citizen proves who they are at any service, without paper.</a:t>
+            </a:r>
+          </a:p>
+        </p:txBody>
+      </p:sp>
+      <p:sp>
+        <p:nvSpPr>
+          <p:cNvPr id="7" name="Rectangle 6"/>
+          <p:cNvSpPr/>
+          <p:nvPr/>
+        </p:nvSpPr>
+        <p:spPr>
+          <a:xfrm>
+            <a:off x="621792" y="4607052"/>
+            <a:ext cx="10881360" cy="12700"/>
+          </a:xfrm>
+          <a:prstGeom prst="rect">
+            <a:avLst/>
+          </a:prstGeom>
+          <a:solidFill>
+            <a:srgbClr val="DDECF4"/>
+          </a:solidFill>
+          <a:ln>
+            <a:noFill/>
+          </a:ln>
+          <a:effectLst/>
+        </p:spPr>
+        <p:style>
+          <a:lnRef idx="1">
+            <a:schemeClr val="accent1"/>
+          </a:lnRef>
+          <a:fillRef idx="3">
+            <a:schemeClr val="accent1"/>
+          </a:fillRef>
+          <a:effectRef idx="2">
+            <a:schemeClr val="accent1"/>
+          </a:effectRef>
+          <a:fontRef idx="minor">
+            <a:schemeClr val="lt1"/>
+          </a:fontRef>
+        </p:style>
+        <p:txBody>
+          <a:bodyPr rtlCol="0" anchor="ctr"/>
+          <a:lstStyle/>
+          <a:p>
+            <a:pPr algn="ctr"/>
+          </a:p>
+        </p:txBody>
+      </p:sp>
+      <p:sp>
+        <p:nvSpPr>
+          <p:cNvPr id="8" name="TextBox 7"/>
+          <p:cNvSpPr txBox="1"/>
+          <p:nvPr/>
+        </p:nvSpPr>
+        <p:spPr>
+          <a:xfrm>
+            <a:off x="658368" y="4648200"/>
+            <a:ext cx="10984687" cy="1569720"/>
+          </a:xfrm>
+          <a:prstGeom prst="rect">
+            <a:avLst/>
+          </a:prstGeom>
+          <a:noFill/>
+        </p:spPr>
+        <p:txBody>
+          <a:bodyPr wrap="square">
+            <a:spAutoFit/>
+          </a:bodyPr>
+          <a:lstStyle/>
+          <a:p>
+            <a:pPr>
+              <a:spcAft>
+                <a:spcPts val="300"/>
+              </a:spcAft>
+            </a:pPr>
+            <a:r>
+              <a:rPr sz="2100" b="1" i="0">
+                <a:solidFill>
+                  <a:srgbClr val="1A1A1A"/>
+                </a:solidFill>
+                <a:latin typeface="Arial"/>
+              </a:rPr>
+              <a:t>One learner record</a:t>
+            </a:r>
+          </a:p>
+          <a:p>
+            <a:pPr>
+              <a:spcAft>
+                <a:spcPts val="300"/>
+              </a:spcAft>
+            </a:pPr>
+            <a:r>
+              <a:rPr sz="1600" b="0" i="0">
+                <a:solidFill>
+                  <a:srgbClr val="595959"/>
+                </a:solidFill>
+                <a:latin typeface="Arial"/>
+              </a:rPr>
+              <a:t>It follows the child from primary school to university.</a:t>
+            </a:r>
+          </a:p>
+        </p:txBody>
+      </p:sp>
+      <p:sp>
+        <p:nvSpPr>
+          <p:cNvPr id="9" name="TextBox 8"/>
+          <p:cNvSpPr txBox="1"/>
+          <p:nvPr/>
+        </p:nvSpPr>
+        <p:spPr>
+          <a:xfrm>
+            <a:off x="658368" y="5623560"/>
+            <a:ext cx="10789920" cy="640080"/>
+          </a:xfrm>
+          <a:prstGeom prst="rect">
+            <a:avLst/>
+          </a:prstGeom>
+          <a:noFill/>
+        </p:spPr>
+        <p:txBody>
+          <a:bodyPr wrap="square">
+            <a:spAutoFit/>
+          </a:bodyPr>
+          <a:lstStyle/>
+          <a:p>
+            <a:r>
+              <a:rPr sz="1700" b="1" i="0">
+                <a:solidFill>
+                  <a:srgbClr val="006E96"/>
+                </a:solidFill>
+                <a:latin typeface="Arial"/>
+              </a:rPr>
+              <a:t>None of these is “put it online.” Each is a redesign of how the ministry works.</a:t>
+            </a:r>
+          </a:p>
+        </p:txBody>
+      </p:sp>
+      <p:sp>
+        <p:nvSpPr>
+          <p:cNvPr id="10" name="TextBox 9"/>
+          <p:cNvSpPr txBox="1"/>
+          <p:nvPr/>
+        </p:nvSpPr>
+        <p:spPr>
+          <a:xfrm>
+            <a:off x="457200" y="6473952"/>
+            <a:ext cx="7772400" cy="292608"/>
+          </a:xfrm>
+          <a:prstGeom prst="rect">
+            <a:avLst/>
+          </a:prstGeom>
+          <a:noFill/>
+        </p:spPr>
+        <p:txBody>
+          <a:bodyPr wrap="square">
+            <a:spAutoFit/>
+          </a:bodyPr>
+          <a:lstStyle/>
+          <a:p>
+            <a:r>
+              <a:rPr sz="900" b="0" i="0">
+                <a:solidFill>
+                  <a:srgbClr val="595959"/>
+                </a:solidFill>
+                <a:latin typeface="Arial"/>
+              </a:rPr>
+              <a:t>1.4 · Why an EA matters more now</a:t>
+            </a:r>
+          </a:p>
+        </p:txBody>
+      </p:sp>
+    </p:spTree>
+  </p:cSld>
+  <p:clrMapOvr>
+    <a:masterClrMapping/>
+  </p:clrMapOvr>
+</p:sld>
+</file>
+
+<file path=ppt/slides/slide29.xml><?xml version="1.0" encoding="utf-8"?>
+<p:sld xmlns:a="http://schemas.openxmlformats.org/drawingml/2006/main" xmlns:p="http://schemas.openxmlformats.org/presentationml/2006/main" xmlns:r="http://schemas.openxmlformats.org/officeDocument/2006/relationships">
+  <p:cSld>
+    <p:spTree>
+      <p:nvGrpSpPr>
+        <p:cNvPr id="1" name=""/>
+        <p:cNvGrpSpPr/>
+        <p:nvPr/>
+      </p:nvGrpSpPr>
+      <p:grpSpPr/>
+      <p:sp>
+        <p:nvSpPr>
+          <p:cNvPr id="2" name="Rectangle 1"/>
+          <p:cNvSpPr/>
+          <p:nvPr/>
+        </p:nvSpPr>
+        <p:spPr>
+          <a:xfrm>
+            <a:off x="457200" y="384048"/>
+            <a:ext cx="45720" cy="256032"/>
+          </a:xfrm>
+          <a:prstGeom prst="rect">
+            <a:avLst/>
+          </a:prstGeom>
+          <a:solidFill>
+            <a:srgbClr val="009CD6"/>
+          </a:solidFill>
+          <a:ln>
+            <a:noFill/>
+          </a:ln>
+          <a:effectLst/>
+        </p:spPr>
+        <p:style>
+          <a:lnRef idx="1">
+            <a:schemeClr val="accent1"/>
+          </a:lnRef>
+          <a:fillRef idx="3">
+            <a:schemeClr val="accent1"/>
+          </a:fillRef>
+          <a:effectRef idx="2">
+            <a:schemeClr val="accent1"/>
+          </a:effectRef>
+          <a:fontRef idx="minor">
+            <a:schemeClr val="lt1"/>
+          </a:fontRef>
+        </p:style>
+        <p:txBody>
+          <a:bodyPr rtlCol="0" anchor="ctr"/>
+          <a:lstStyle/>
+          <a:p>
+            <a:pPr algn="ctr"/>
+          </a:p>
+        </p:txBody>
+      </p:sp>
+      <p:sp>
+        <p:nvSpPr>
+          <p:cNvPr id="3" name="TextBox 2"/>
+          <p:cNvSpPr txBox="1"/>
+          <p:nvPr/>
+        </p:nvSpPr>
+        <p:spPr>
+          <a:xfrm>
+            <a:off x="621792" y="274320"/>
+            <a:ext cx="11247120" cy="914400"/>
+          </a:xfrm>
+          <a:prstGeom prst="rect">
+            <a:avLst/>
+          </a:prstGeom>
+          <a:noFill/>
+        </p:spPr>
+        <p:txBody>
+          <a:bodyPr wrap="square">
+            <a:spAutoFit/>
+          </a:bodyPr>
+          <a:lstStyle/>
+          <a:p>
+            <a:r>
+              <a:rPr sz="2800" b="1" i="0">
+                <a:solidFill>
+                  <a:srgbClr val="1A1A1A"/>
+                </a:solidFill>
+                <a:latin typeface="Arial"/>
+              </a:rPr>
+              <a:t>The new work needs business and IT to decide together</a:t>
+            </a:r>
+          </a:p>
+        </p:txBody>
+      </p:sp>
+      <p:sp>
+        <p:nvSpPr>
+          <p:cNvPr id="4" name="TextBox 3"/>
+          <p:cNvSpPr txBox="1"/>
+          <p:nvPr/>
+        </p:nvSpPr>
+        <p:spPr>
+          <a:xfrm>
+            <a:off x="658368" y="1828800"/>
+            <a:ext cx="10789920" cy="3931920"/>
+          </a:xfrm>
+          <a:prstGeom prst="rect">
+            <a:avLst/>
+          </a:prstGeom>
+          <a:noFill/>
+        </p:spPr>
+        <p:txBody>
+          <a:bodyPr wrap="square">
+            <a:spAutoFit/>
+          </a:bodyPr>
+          <a:lstStyle/>
+          <a:p>
+            <a:pPr>
+              <a:spcAft>
+                <a:spcPts val="1600"/>
+              </a:spcAft>
+            </a:pPr>
+            <a:r>
+              <a:rPr sz="2200" b="0" i="0">
+                <a:solidFill>
+                  <a:srgbClr val="1A1A1A"/>
+                </a:solidFill>
+                <a:latin typeface="Arial"/>
+              </a:rPr>
+              <a:t>When you redesign how your ministry works, two groups must decide together.</a:t>
+            </a:r>
+          </a:p>
+          <a:p>
+            <a:pPr>
+              <a:spcAft>
+                <a:spcPts val="1600"/>
+              </a:spcAft>
+            </a:pPr>
+            <a:r>
+              <a:rPr sz="2000" b="1" i="0">
+                <a:solidFill>
+                  <a:srgbClr val="1A1A1A"/>
+                </a:solidFill>
+                <a:latin typeface="Arial"/>
+              </a:rPr>
+              <a:t>The business side: </a:t>
+            </a:r>
+            <a:r>
+              <a:rPr sz="2000" b="0" i="0">
+                <a:solidFill>
+                  <a:srgbClr val="1A1A1A"/>
+                </a:solidFill>
+                <a:latin typeface="Arial"/>
+              </a:rPr>
+              <a:t>your minister, your director-general, your head of policy.</a:t>
+            </a:r>
+          </a:p>
+          <a:p>
+            <a:pPr>
+              <a:spcAft>
+                <a:spcPts val="1600"/>
+              </a:spcAft>
+            </a:pPr>
+            <a:r>
+              <a:rPr sz="2000" b="1" i="0">
+                <a:solidFill>
+                  <a:srgbClr val="1A1A1A"/>
+                </a:solidFill>
+                <a:latin typeface="Arial"/>
+              </a:rPr>
+              <a:t>The IT side: </a:t>
+            </a:r>
+            <a:r>
+              <a:rPr sz="2000" b="0" i="0">
+                <a:solidFill>
+                  <a:srgbClr val="1A1A1A"/>
+                </a:solidFill>
+                <a:latin typeface="Arial"/>
+              </a:rPr>
+              <a:t>your architects, your engineers.</a:t>
+            </a:r>
+          </a:p>
+          <a:p>
+            <a:pPr>
+              <a:spcAft>
+                <a:spcPts val="1600"/>
+              </a:spcAft>
+            </a:pPr>
+            <a:r>
+              <a:rPr sz="2000" b="0" i="0">
+                <a:solidFill>
+                  <a:srgbClr val="595959"/>
+                </a:solidFill>
+                <a:latin typeface="Arial"/>
+              </a:rPr>
+              <a:t>In the old work, business decided what and IT delivered how. In the new work, they decide together — about the same questions, with the same seriousness.</a:t>
+            </a:r>
+          </a:p>
+        </p:txBody>
+      </p:sp>
+      <p:sp>
+        <p:nvSpPr>
+          <p:cNvPr id="5" name="TextBox 4"/>
+          <p:cNvSpPr txBox="1"/>
+          <p:nvPr/>
+        </p:nvSpPr>
+        <p:spPr>
+          <a:xfrm>
+            <a:off x="457200" y="6473952"/>
+            <a:ext cx="7772400" cy="292608"/>
+          </a:xfrm>
+          <a:prstGeom prst="rect">
+            <a:avLst/>
+          </a:prstGeom>
+          <a:noFill/>
+        </p:spPr>
+        <p:txBody>
+          <a:bodyPr wrap="square">
+            <a:spAutoFit/>
+          </a:bodyPr>
+          <a:lstStyle/>
+          <a:p>
+            <a:r>
+              <a:rPr sz="900" b="0" i="0">
+                <a:solidFill>
+                  <a:srgbClr val="595959"/>
+                </a:solidFill>
+                <a:latin typeface="Arial"/>
+              </a:rPr>
+              <a:t>1.4 · Why an EA matters more now</a:t>
+            </a:r>
+          </a:p>
+        </p:txBody>
+      </p:sp>
+    </p:spTree>
+  </p:cSld>
+  <p:clrMapOvr>
+    <a:masterClrMapping/>
+  </p:clrMapOvr>
+</p:sld>
+</file>
+
+<file path=ppt/slides/slide30.xml><?xml version="1.0" encoding="utf-8"?>
+<p:sld xmlns:a="http://schemas.openxmlformats.org/drawingml/2006/main" xmlns:p="http://schemas.openxmlformats.org/presentationml/2006/main" xmlns:r="http://schemas.openxmlformats.org/officeDocument/2006/relationships">
+  <p:cSld>
+    <p:spTree>
+      <p:nvGrpSpPr>
+        <p:cNvPr id="1" name=""/>
+        <p:cNvGrpSpPr/>
+        <p:nvPr/>
+      </p:nvGrpSpPr>
+      <p:grpSpPr/>
+      <p:sp>
+        <p:nvSpPr>
+          <p:cNvPr id="2" name="Rectangle 1"/>
+          <p:cNvSpPr/>
+          <p:nvPr/>
+        </p:nvSpPr>
+        <p:spPr>
+          <a:xfrm>
+            <a:off x="457200" y="384048"/>
+            <a:ext cx="45720" cy="256032"/>
+          </a:xfrm>
+          <a:prstGeom prst="rect">
+            <a:avLst/>
+          </a:prstGeom>
+          <a:solidFill>
+            <a:srgbClr val="009CD6"/>
+          </a:solidFill>
+          <a:ln>
+            <a:noFill/>
+          </a:ln>
+          <a:effectLst/>
+        </p:spPr>
+        <p:style>
+          <a:lnRef idx="1">
+            <a:schemeClr val="accent1"/>
+          </a:lnRef>
+          <a:fillRef idx="3">
+            <a:schemeClr val="accent1"/>
+          </a:fillRef>
+          <a:effectRef idx="2">
+            <a:schemeClr val="accent1"/>
+          </a:effectRef>
+          <a:fontRef idx="minor">
+            <a:schemeClr val="lt1"/>
+          </a:fontRef>
+        </p:style>
+        <p:txBody>
+          <a:bodyPr rtlCol="0" anchor="ctr"/>
+          <a:lstStyle/>
+          <a:p>
+            <a:pPr algn="ctr"/>
+          </a:p>
+        </p:txBody>
+      </p:sp>
+      <p:sp>
+        <p:nvSpPr>
+          <p:cNvPr id="3" name="TextBox 2"/>
+          <p:cNvSpPr txBox="1"/>
+          <p:nvPr/>
+        </p:nvSpPr>
+        <p:spPr>
+          <a:xfrm>
+            <a:off x="621792" y="274320"/>
+            <a:ext cx="11247120" cy="914400"/>
+          </a:xfrm>
+          <a:prstGeom prst="rect">
+            <a:avLst/>
+          </a:prstGeom>
+          <a:noFill/>
+        </p:spPr>
+        <p:txBody>
+          <a:bodyPr wrap="square">
+            <a:spAutoFit/>
+          </a:bodyPr>
+          <a:lstStyle/>
+          <a:p>
+            <a:r>
+              <a:rPr sz="2800" b="1" i="0">
+                <a:solidFill>
+                  <a:srgbClr val="1A1A1A"/>
+                </a:solidFill>
+                <a:latin typeface="Arial"/>
+              </a:rPr>
+              <a:t>They sit in the same meeting — and miss each other</a:t>
+            </a:r>
+          </a:p>
+        </p:txBody>
+      </p:sp>
+      <p:sp>
+        <p:nvSpPr>
+          <p:cNvPr id="4" name="Rounded Rectangle 3"/>
+          <p:cNvSpPr/>
+          <p:nvPr/>
+        </p:nvSpPr>
+        <p:spPr>
+          <a:xfrm>
+            <a:off x="658368" y="1645920"/>
+            <a:ext cx="5394960" cy="2194560"/>
+          </a:xfrm>
+          <a:prstGeom prst="roundRect">
+            <a:avLst>
+              <a:gd name="adj" fmla="val 4500"/>
+            </a:avLst>
+          </a:prstGeom>
+          <a:solidFill>
+            <a:srgbClr val="E5F5FB"/>
+          </a:solidFill>
+          <a:ln>
+            <a:noFill/>
+          </a:ln>
+          <a:effectLst/>
+        </p:spPr>
+        <p:style>
+          <a:lnRef idx="1">
+            <a:schemeClr val="accent1"/>
+          </a:lnRef>
+          <a:fillRef idx="3">
+            <a:schemeClr val="accent1"/>
+          </a:fillRef>
+          <a:effectRef idx="2">
+            <a:schemeClr val="accent1"/>
+          </a:effectRef>
+          <a:fontRef idx="minor">
+            <a:schemeClr val="lt1"/>
+          </a:fontRef>
+        </p:style>
+        <p:txBody>
+          <a:bodyPr rtlCol="0" anchor="ctr"/>
+          <a:lstStyle/>
+          <a:p>
+            <a:pPr algn="ctr"/>
+          </a:p>
+        </p:txBody>
+      </p:sp>
+      <p:sp>
+        <p:nvSpPr>
+          <p:cNvPr id="5" name="TextBox 4"/>
+          <p:cNvSpPr txBox="1"/>
+          <p:nvPr/>
+        </p:nvSpPr>
+        <p:spPr>
+          <a:xfrm>
+            <a:off x="859536" y="1792224"/>
+            <a:ext cx="4992624" cy="1920240"/>
+          </a:xfrm>
+          <a:prstGeom prst="rect">
+            <a:avLst/>
+          </a:prstGeom>
+          <a:noFill/>
+        </p:spPr>
+        <p:txBody>
+          <a:bodyPr wrap="square">
+            <a:spAutoFit/>
+          </a:bodyPr>
+          <a:lstStyle/>
+          <a:p>
+            <a:pPr>
+              <a:spcAft>
+                <a:spcPts val="700"/>
+              </a:spcAft>
+            </a:pPr>
+            <a:r>
+              <a:rPr sz="1500" b="0" i="0">
+                <a:solidFill>
+                  <a:srgbClr val="595959"/>
+                </a:solidFill>
+                <a:latin typeface="Arial"/>
+              </a:rPr>
+              <a:t>Your minister talks about</a:t>
+            </a:r>
+          </a:p>
+          <a:p>
+            <a:pPr>
+              <a:spcAft>
+                <a:spcPts val="700"/>
+              </a:spcAft>
+            </a:pPr>
+            <a:r>
+              <a:rPr sz="2000" b="1" i="0">
+                <a:solidFill>
+                  <a:srgbClr val="1A1A1A"/>
+                </a:solidFill>
+                <a:latin typeface="Arial"/>
+              </a:rPr>
+              <a:t>citizen services and policy goals</a:t>
+            </a:r>
+          </a:p>
+        </p:txBody>
+      </p:sp>
+      <p:sp>
+        <p:nvSpPr>
+          <p:cNvPr id="6" name="Rounded Rectangle 5"/>
+          <p:cNvSpPr/>
+          <p:nvPr/>
+        </p:nvSpPr>
+        <p:spPr>
+          <a:xfrm>
+            <a:off x="6281928" y="1645920"/>
+            <a:ext cx="5394960" cy="2194560"/>
+          </a:xfrm>
+          <a:prstGeom prst="roundRect">
+            <a:avLst>
+              <a:gd name="adj" fmla="val 4500"/>
+            </a:avLst>
+          </a:prstGeom>
+          <a:solidFill>
+            <a:srgbClr val="E5F5FB"/>
+          </a:solidFill>
+          <a:ln>
+            <a:noFill/>
+          </a:ln>
+          <a:effectLst/>
+        </p:spPr>
+        <p:style>
+          <a:lnRef idx="1">
+            <a:schemeClr val="accent1"/>
+          </a:lnRef>
+          <a:fillRef idx="3">
+            <a:schemeClr val="accent1"/>
+          </a:fillRef>
+          <a:effectRef idx="2">
+            <a:schemeClr val="accent1"/>
+          </a:effectRef>
+          <a:fontRef idx="minor">
+            <a:schemeClr val="lt1"/>
+          </a:fontRef>
+        </p:style>
+        <p:txBody>
+          <a:bodyPr rtlCol="0" anchor="ctr"/>
+          <a:lstStyle/>
+          <a:p>
+            <a:pPr algn="ctr"/>
+          </a:p>
+        </p:txBody>
+      </p:sp>
+      <p:sp>
+        <p:nvSpPr>
+          <p:cNvPr id="7" name="TextBox 6"/>
+          <p:cNvSpPr txBox="1"/>
+          <p:nvPr/>
+        </p:nvSpPr>
+        <p:spPr>
+          <a:xfrm>
+            <a:off x="6483096" y="1792224"/>
+            <a:ext cx="4992624" cy="1920240"/>
+          </a:xfrm>
+          <a:prstGeom prst="rect">
+            <a:avLst/>
+          </a:prstGeom>
+          <a:noFill/>
+        </p:spPr>
+        <p:txBody>
+          <a:bodyPr wrap="square">
+            <a:spAutoFit/>
+          </a:bodyPr>
+          <a:lstStyle/>
+          <a:p>
+            <a:pPr>
+              <a:spcAft>
+                <a:spcPts val="700"/>
+              </a:spcAft>
+            </a:pPr>
+            <a:r>
+              <a:rPr sz="1500" b="0" i="0">
+                <a:solidFill>
+                  <a:srgbClr val="595959"/>
+                </a:solidFill>
+                <a:latin typeface="Arial"/>
+              </a:rPr>
+              <a:t>Your chief architect talks about</a:t>
+            </a:r>
+          </a:p>
+          <a:p>
+            <a:pPr>
+              <a:spcAft>
+                <a:spcPts val="700"/>
+              </a:spcAft>
+            </a:pPr>
+            <a:r>
+              <a:rPr sz="2000" b="1" i="0">
+                <a:solidFill>
+                  <a:srgbClr val="1A1A1A"/>
+                </a:solidFill>
+                <a:latin typeface="Arial"/>
+              </a:rPr>
+              <a:t>systems, APIs and data</a:t>
+            </a:r>
+          </a:p>
+        </p:txBody>
+      </p:sp>
+      <p:sp>
+        <p:nvSpPr>
+          <p:cNvPr id="8" name="TextBox 7"/>
+          <p:cNvSpPr txBox="1"/>
+          <p:nvPr/>
+        </p:nvSpPr>
+        <p:spPr>
+          <a:xfrm>
+            <a:off x="658368" y="4297680"/>
+            <a:ext cx="10789920" cy="1645920"/>
+          </a:xfrm>
+          <a:prstGeom prst="rect">
+            <a:avLst/>
+          </a:prstGeom>
+          <a:noFill/>
+        </p:spPr>
+        <p:txBody>
+          <a:bodyPr wrap="square">
+            <a:spAutoFit/>
+          </a:bodyPr>
+          <a:lstStyle/>
+          <a:p>
+            <a:pPr>
+              <a:spcAft>
+                <a:spcPts val="1000"/>
+              </a:spcAft>
+            </a:pPr>
+            <a:r>
+              <a:rPr sz="2100" b="1" i="0">
+                <a:solidFill>
+                  <a:srgbClr val="1A1A1A"/>
+                </a:solidFill>
+                <a:latin typeface="Arial"/>
+              </a:rPr>
+              <a:t>The decision does not get made well — or it does not get made at all.</a:t>
+            </a:r>
+          </a:p>
+          <a:p>
+            <a:pPr>
+              <a:spcAft>
+                <a:spcPts val="1000"/>
+              </a:spcAft>
+            </a:pPr>
+            <a:r>
+              <a:rPr sz="1700" b="0" i="0">
+                <a:solidFill>
+                  <a:srgbClr val="595959"/>
+                </a:solidFill>
+                <a:latin typeface="Arial"/>
+              </a:rPr>
+              <a:t>And the ministry stays in the old work, even though the new work is what is needed.</a:t>
+            </a:r>
+          </a:p>
+        </p:txBody>
+      </p:sp>
+      <p:sp>
+        <p:nvSpPr>
+          <p:cNvPr id="9" name="TextBox 8"/>
+          <p:cNvSpPr txBox="1"/>
+          <p:nvPr/>
+        </p:nvSpPr>
+        <p:spPr>
+          <a:xfrm>
+            <a:off x="457200" y="6473952"/>
+            <a:ext cx="7772400" cy="292608"/>
+          </a:xfrm>
+          <a:prstGeom prst="rect">
+            <a:avLst/>
+          </a:prstGeom>
+          <a:noFill/>
+        </p:spPr>
+        <p:txBody>
+          <a:bodyPr wrap="square">
+            <a:spAutoFit/>
+          </a:bodyPr>
+          <a:lstStyle/>
+          <a:p>
+            <a:r>
+              <a:rPr sz="900" b="0" i="0">
+                <a:solidFill>
+                  <a:srgbClr val="595959"/>
+                </a:solidFill>
+                <a:latin typeface="Arial"/>
+              </a:rPr>
+              <a:t>1.4 · Why an EA matters more now</a:t>
+            </a:r>
+          </a:p>
+        </p:txBody>
+      </p:sp>
+    </p:spTree>
+  </p:cSld>
+  <p:clrMapOvr>
+    <a:masterClrMapping/>
+  </p:clrMapOvr>
+</p:sld>
+</file>
+
+<file path=ppt/slides/slide31.xml><?xml version="1.0" encoding="utf-8"?>
+<p:sld xmlns:a="http://schemas.openxmlformats.org/drawingml/2006/main" xmlns:p="http://schemas.openxmlformats.org/presentationml/2006/main" xmlns:r="http://schemas.openxmlformats.org/officeDocument/2006/relationships">
+  <p:cSld>
+    <p:spTree>
+      <p:nvGrpSpPr>
+        <p:cNvPr id="1" name=""/>
+        <p:cNvGrpSpPr/>
+        <p:nvPr/>
+      </p:nvGrpSpPr>
+      <p:grpSpPr/>
+      <p:sp>
+        <p:nvSpPr>
+          <p:cNvPr id="2" name="Rectangle 1"/>
+          <p:cNvSpPr/>
+          <p:nvPr/>
+        </p:nvSpPr>
+        <p:spPr>
+          <a:xfrm>
+            <a:off x="457200" y="384048"/>
+            <a:ext cx="45720" cy="256032"/>
+          </a:xfrm>
+          <a:prstGeom prst="rect">
+            <a:avLst/>
+          </a:prstGeom>
+          <a:solidFill>
+            <a:srgbClr val="009CD6"/>
+          </a:solidFill>
+          <a:ln>
+            <a:noFill/>
+          </a:ln>
+          <a:effectLst/>
+        </p:spPr>
+        <p:style>
+          <a:lnRef idx="1">
+            <a:schemeClr val="accent1"/>
+          </a:lnRef>
+          <a:fillRef idx="3">
+            <a:schemeClr val="accent1"/>
+          </a:fillRef>
+          <a:effectRef idx="2">
+            <a:schemeClr val="accent1"/>
+          </a:effectRef>
+          <a:fontRef idx="minor">
+            <a:schemeClr val="lt1"/>
+          </a:fontRef>
+        </p:style>
+        <p:txBody>
+          <a:bodyPr rtlCol="0" anchor="ctr"/>
+          <a:lstStyle/>
+          <a:p>
+            <a:pPr algn="ctr"/>
+          </a:p>
+        </p:txBody>
+      </p:sp>
+      <p:sp>
+        <p:nvSpPr>
+          <p:cNvPr id="3" name="TextBox 2"/>
+          <p:cNvSpPr txBox="1"/>
+          <p:nvPr/>
+        </p:nvSpPr>
+        <p:spPr>
+          <a:xfrm>
+            <a:off x="621792" y="274320"/>
+            <a:ext cx="11247120" cy="914400"/>
+          </a:xfrm>
+          <a:prstGeom prst="rect">
+            <a:avLst/>
+          </a:prstGeom>
+          <a:noFill/>
+        </p:spPr>
+        <p:txBody>
+          <a:bodyPr wrap="square">
+            <a:spAutoFit/>
+          </a:bodyPr>
+          <a:lstStyle/>
+          <a:p>
+            <a:r>
+              <a:rPr sz="2800" b="1" i="0">
+                <a:solidFill>
+                  <a:srgbClr val="1A1A1A"/>
+                </a:solidFill>
+                <a:latin typeface="Arial"/>
+              </a:rPr>
+              <a:t>An EA gives both sides one language</a:t>
+            </a:r>
+          </a:p>
+        </p:txBody>
+      </p:sp>
+      <p:sp>
+        <p:nvSpPr>
+          <p:cNvPr id="4" name="Oval 3"/>
+          <p:cNvSpPr/>
+          <p:nvPr/>
+        </p:nvSpPr>
+        <p:spPr>
+          <a:xfrm>
+            <a:off x="621792" y="1463040"/>
+            <a:ext cx="310896" cy="310896"/>
+          </a:xfrm>
+          <a:prstGeom prst="ellipse">
+            <a:avLst/>
+          </a:prstGeom>
+          <a:solidFill>
+            <a:srgbClr val="009CD6"/>
+          </a:solidFill>
+          <a:ln>
+            <a:noFill/>
+          </a:ln>
+          <a:effectLst/>
+        </p:spPr>
+        <p:style>
+          <a:lnRef idx="1">
+            <a:schemeClr val="accent1"/>
+          </a:lnRef>
+          <a:fillRef idx="3">
+            <a:schemeClr val="accent1"/>
+          </a:fillRef>
+          <a:effectRef idx="2">
+            <a:schemeClr val="accent1"/>
+          </a:effectRef>
+          <a:fontRef idx="minor">
+            <a:schemeClr val="lt1"/>
+          </a:fontRef>
+        </p:style>
+        <p:txBody>
+          <a:bodyPr rtlCol="0" anchor="ctr" lIns="0" rIns="0" tIns="0" bIns="0" wrap="square"/>
+          <a:lstStyle/>
+          <a:p>
+            <a:pPr algn="ctr"/>
+            <a:r>
+              <a:rPr sz="1300" b="1" i="0">
+                <a:solidFill>
+                  <a:srgbClr val="FFFFFF"/>
+                </a:solidFill>
+                <a:latin typeface="Arial"/>
+              </a:rPr>
+              <a:t>1</a:t>
+            </a:r>
+          </a:p>
+        </p:txBody>
+      </p:sp>
+      <p:sp>
+        <p:nvSpPr>
+          <p:cNvPr id="5" name="TextBox 4"/>
+          <p:cNvSpPr txBox="1"/>
+          <p:nvPr/>
+        </p:nvSpPr>
+        <p:spPr>
+          <a:xfrm>
+            <a:off x="1115568" y="1417320"/>
+            <a:ext cx="10527487" cy="1569720"/>
+          </a:xfrm>
+          <a:prstGeom prst="rect">
+            <a:avLst/>
+          </a:prstGeom>
+          <a:noFill/>
+        </p:spPr>
+        <p:txBody>
+          <a:bodyPr wrap="square">
+            <a:spAutoFit/>
+          </a:bodyPr>
+          <a:lstStyle/>
+          <a:p>
+            <a:pPr>
+              <a:spcAft>
+                <a:spcPts val="300"/>
+              </a:spcAft>
+            </a:pPr>
+            <a:r>
+              <a:rPr sz="2100" b="1" i="0">
+                <a:solidFill>
+                  <a:srgbClr val="1A1A1A"/>
+                </a:solidFill>
+                <a:latin typeface="Arial"/>
+              </a:rPr>
+              <a:t>The agreed picture</a:t>
+            </a:r>
+          </a:p>
+          <a:p>
+            <a:pPr>
+              <a:spcAft>
+                <a:spcPts val="300"/>
+              </a:spcAft>
+            </a:pPr>
+            <a:r>
+              <a:rPr sz="1600" b="0" i="0">
+                <a:solidFill>
+                  <a:srgbClr val="595959"/>
+                </a:solidFill>
+                <a:latin typeface="Arial"/>
+              </a:rPr>
+              <a:t>Something both sides can point at.</a:t>
+            </a:r>
+          </a:p>
+        </p:txBody>
+      </p:sp>
+      <p:sp>
+        <p:nvSpPr>
+          <p:cNvPr id="6" name="Rectangle 5"/>
+          <p:cNvSpPr/>
+          <p:nvPr/>
+        </p:nvSpPr>
+        <p:spPr>
+          <a:xfrm>
+            <a:off x="621792" y="2991612"/>
+            <a:ext cx="10881360" cy="12700"/>
+          </a:xfrm>
+          <a:prstGeom prst="rect">
+            <a:avLst/>
+          </a:prstGeom>
+          <a:solidFill>
+            <a:srgbClr val="DDECF4"/>
+          </a:solidFill>
+          <a:ln>
+            <a:noFill/>
+          </a:ln>
+          <a:effectLst/>
+        </p:spPr>
+        <p:style>
+          <a:lnRef idx="1">
+            <a:schemeClr val="accent1"/>
+          </a:lnRef>
+          <a:fillRef idx="3">
+            <a:schemeClr val="accent1"/>
+          </a:fillRef>
+          <a:effectRef idx="2">
+            <a:schemeClr val="accent1"/>
+          </a:effectRef>
+          <a:fontRef idx="minor">
+            <a:schemeClr val="lt1"/>
+          </a:fontRef>
+        </p:style>
+        <p:txBody>
+          <a:bodyPr rtlCol="0" anchor="ctr"/>
+          <a:lstStyle/>
+          <a:p>
+            <a:pPr algn="ctr"/>
+          </a:p>
+        </p:txBody>
+      </p:sp>
+      <p:sp>
+        <p:nvSpPr>
+          <p:cNvPr id="7" name="Oval 6"/>
+          <p:cNvSpPr/>
+          <p:nvPr/>
+        </p:nvSpPr>
+        <p:spPr>
+          <a:xfrm>
+            <a:off x="621792" y="3078479"/>
+            <a:ext cx="310896" cy="310896"/>
+          </a:xfrm>
+          <a:prstGeom prst="ellipse">
+            <a:avLst/>
+          </a:prstGeom>
+          <a:solidFill>
+            <a:srgbClr val="009CD6"/>
+          </a:solidFill>
+          <a:ln>
+            <a:noFill/>
+          </a:ln>
+          <a:effectLst/>
+        </p:spPr>
+        <p:style>
+          <a:lnRef idx="1">
+            <a:schemeClr val="accent1"/>
+          </a:lnRef>
+          <a:fillRef idx="3">
+            <a:schemeClr val="accent1"/>
+          </a:fillRef>
+          <a:effectRef idx="2">
+            <a:schemeClr val="accent1"/>
+          </a:effectRef>
+          <a:fontRef idx="minor">
+            <a:schemeClr val="lt1"/>
+          </a:fontRef>
+        </p:style>
+        <p:txBody>
+          <a:bodyPr rtlCol="0" anchor="ctr" lIns="0" rIns="0" tIns="0" bIns="0" wrap="square"/>
+          <a:lstStyle/>
+          <a:p>
+            <a:pPr algn="ctr"/>
+            <a:r>
+              <a:rPr sz="1300" b="1" i="0">
+                <a:solidFill>
+                  <a:srgbClr val="FFFFFF"/>
+                </a:solidFill>
+                <a:latin typeface="Arial"/>
+              </a:rPr>
+              <a:t>2</a:t>
+            </a:r>
+          </a:p>
+        </p:txBody>
+      </p:sp>
+      <p:sp>
+        <p:nvSpPr>
+          <p:cNvPr id="8" name="TextBox 7"/>
+          <p:cNvSpPr txBox="1"/>
+          <p:nvPr/>
+        </p:nvSpPr>
+        <p:spPr>
+          <a:xfrm>
+            <a:off x="1115568" y="3032760"/>
+            <a:ext cx="10527487" cy="1569720"/>
+          </a:xfrm>
+          <a:prstGeom prst="rect">
+            <a:avLst/>
+          </a:prstGeom>
+          <a:noFill/>
+        </p:spPr>
+        <p:txBody>
+          <a:bodyPr wrap="square">
+            <a:spAutoFit/>
+          </a:bodyPr>
+          <a:lstStyle/>
+          <a:p>
+            <a:pPr>
+              <a:spcAft>
+                <a:spcPts val="300"/>
+              </a:spcAft>
+            </a:pPr>
+            <a:r>
+              <a:rPr sz="2100" b="1" i="0">
+                <a:solidFill>
+                  <a:srgbClr val="1A1A1A"/>
+                </a:solidFill>
+                <a:latin typeface="Arial"/>
+              </a:rPr>
+              <a:t>Plain words for the basic terms</a:t>
+            </a:r>
+          </a:p>
+          <a:p>
+            <a:pPr>
+              <a:spcAft>
+                <a:spcPts val="300"/>
+              </a:spcAft>
+            </a:pPr>
+            <a:r>
+              <a:rPr sz="1600" b="0" i="0">
+                <a:solidFill>
+                  <a:srgbClr val="595959"/>
+                </a:solidFill>
+                <a:latin typeface="Arial"/>
+              </a:rPr>
+              <a:t>Service, capability, data domain — meaning the same thing to both sides.</a:t>
+            </a:r>
+          </a:p>
+        </p:txBody>
+      </p:sp>
+      <p:sp>
+        <p:nvSpPr>
+          <p:cNvPr id="9" name="Rectangle 8"/>
+          <p:cNvSpPr/>
+          <p:nvPr/>
+        </p:nvSpPr>
+        <p:spPr>
+          <a:xfrm>
+            <a:off x="621792" y="4607052"/>
+            <a:ext cx="10881360" cy="12700"/>
+          </a:xfrm>
+          <a:prstGeom prst="rect">
+            <a:avLst/>
+          </a:prstGeom>
+          <a:solidFill>
+            <a:srgbClr val="DDECF4"/>
+          </a:solidFill>
+          <a:ln>
+            <a:noFill/>
+          </a:ln>
+          <a:effectLst/>
+        </p:spPr>
+        <p:style>
+          <a:lnRef idx="1">
+            <a:schemeClr val="accent1"/>
+          </a:lnRef>
+          <a:fillRef idx="3">
+            <a:schemeClr val="accent1"/>
+          </a:fillRef>
+          <a:effectRef idx="2">
+            <a:schemeClr val="accent1"/>
+          </a:effectRef>
+          <a:fontRef idx="minor">
+            <a:schemeClr val="lt1"/>
+          </a:fontRef>
+        </p:style>
+        <p:txBody>
+          <a:bodyPr rtlCol="0" anchor="ctr"/>
+          <a:lstStyle/>
+          <a:p>
+            <a:pPr algn="ctr"/>
+          </a:p>
+        </p:txBody>
+      </p:sp>
+      <p:sp>
+        <p:nvSpPr>
+          <p:cNvPr id="10" name="Oval 9"/>
+          <p:cNvSpPr/>
+          <p:nvPr/>
+        </p:nvSpPr>
+        <p:spPr>
+          <a:xfrm>
+            <a:off x="621792" y="4693920"/>
+            <a:ext cx="310896" cy="310896"/>
+          </a:xfrm>
+          <a:prstGeom prst="ellipse">
+            <a:avLst/>
+          </a:prstGeom>
+          <a:solidFill>
+            <a:srgbClr val="009CD6"/>
+          </a:solidFill>
+          <a:ln>
+            <a:noFill/>
+          </a:ln>
+          <a:effectLst/>
+        </p:spPr>
+        <p:style>
+          <a:lnRef idx="1">
+            <a:schemeClr val="accent1"/>
+          </a:lnRef>
+          <a:fillRef idx="3">
+            <a:schemeClr val="accent1"/>
+          </a:fillRef>
+          <a:effectRef idx="2">
+            <a:schemeClr val="accent1"/>
+          </a:effectRef>
+          <a:fontRef idx="minor">
+            <a:schemeClr val="lt1"/>
+          </a:fontRef>
+        </p:style>
+        <p:txBody>
+          <a:bodyPr rtlCol="0" anchor="ctr" lIns="0" rIns="0" tIns="0" bIns="0" wrap="square"/>
+          <a:lstStyle/>
+          <a:p>
+            <a:pPr algn="ctr"/>
+            <a:r>
+              <a:rPr sz="1300" b="1" i="0">
+                <a:solidFill>
+                  <a:srgbClr val="FFFFFF"/>
+                </a:solidFill>
+                <a:latin typeface="Arial"/>
+              </a:rPr>
+              <a:t>3</a:t>
+            </a:r>
+          </a:p>
+        </p:txBody>
+      </p:sp>
+      <p:sp>
+        <p:nvSpPr>
+          <p:cNvPr id="11" name="TextBox 10"/>
+          <p:cNvSpPr txBox="1"/>
+          <p:nvPr/>
+        </p:nvSpPr>
+        <p:spPr>
+          <a:xfrm>
+            <a:off x="1115568" y="4648200"/>
+            <a:ext cx="10527487" cy="1569720"/>
+          </a:xfrm>
+          <a:prstGeom prst="rect">
+            <a:avLst/>
+          </a:prstGeom>
+          <a:noFill/>
+        </p:spPr>
+        <p:txBody>
+          <a:bodyPr wrap="square">
+            <a:spAutoFit/>
+          </a:bodyPr>
+          <a:lstStyle/>
+          <a:p>
+            <a:pPr>
+              <a:spcAft>
+                <a:spcPts val="300"/>
+              </a:spcAft>
+            </a:pPr>
+            <a:r>
+              <a:rPr sz="2100" b="1" i="0">
+                <a:solidFill>
+                  <a:srgbClr val="1A1A1A"/>
+                </a:solidFill>
+                <a:latin typeface="Arial"/>
+              </a:rPr>
+              <a:t>A regular forum — the EA Board</a:t>
+            </a:r>
+          </a:p>
+          <a:p>
+            <a:pPr>
+              <a:spcAft>
+                <a:spcPts val="300"/>
+              </a:spcAft>
+            </a:pPr>
+            <a:r>
+              <a:rPr sz="1600" b="0" i="0">
+                <a:solidFill>
+                  <a:srgbClr val="595959"/>
+                </a:solidFill>
+                <a:latin typeface="Arial"/>
+              </a:rPr>
+              <a:t>Where business and IT sit together and decide.</a:t>
+            </a:r>
+          </a:p>
+        </p:txBody>
+      </p:sp>
+      <p:sp>
+        <p:nvSpPr>
+          <p:cNvPr id="12" name="TextBox 11"/>
+          <p:cNvSpPr txBox="1"/>
+          <p:nvPr/>
+        </p:nvSpPr>
+        <p:spPr>
+          <a:xfrm>
+            <a:off x="658368" y="5669280"/>
+            <a:ext cx="10789920" cy="640080"/>
+          </a:xfrm>
+          <a:prstGeom prst="rect">
+            <a:avLst/>
+          </a:prstGeom>
+          <a:noFill/>
+        </p:spPr>
+        <p:txBody>
+          <a:bodyPr wrap="square">
+            <a:spAutoFit/>
+          </a:bodyPr>
+          <a:lstStyle/>
+          <a:p>
+            <a:r>
+              <a:rPr sz="1600" b="0" i="1">
+                <a:solidFill>
+                  <a:srgbClr val="595959"/>
+                </a:solidFill>
+                <a:latin typeface="Arial"/>
+              </a:rPr>
+              <a:t>With these in place, the redesign conversation finally happens. Without them, it does not.</a:t>
+            </a:r>
+          </a:p>
+        </p:txBody>
+      </p:sp>
+      <p:sp>
+        <p:nvSpPr>
+          <p:cNvPr id="13" name="TextBox 12"/>
+          <p:cNvSpPr txBox="1"/>
+          <p:nvPr/>
+        </p:nvSpPr>
+        <p:spPr>
+          <a:xfrm>
+            <a:off x="457200" y="6473952"/>
+            <a:ext cx="7772400" cy="292608"/>
+          </a:xfrm>
+          <a:prstGeom prst="rect">
+            <a:avLst/>
+          </a:prstGeom>
+          <a:noFill/>
+        </p:spPr>
+        <p:txBody>
+          <a:bodyPr wrap="square">
+            <a:spAutoFit/>
+          </a:bodyPr>
+          <a:lstStyle/>
+          <a:p>
+            <a:r>
+              <a:rPr sz="900" b="0" i="0">
+                <a:solidFill>
+                  <a:srgbClr val="595959"/>
+                </a:solidFill>
+                <a:latin typeface="Arial"/>
+              </a:rPr>
+              <a:t>1.4 · Why an EA matters more now</a:t>
+            </a:r>
+          </a:p>
+        </p:txBody>
+      </p:sp>
+    </p:spTree>
+  </p:cSld>
+  <p:clrMapOvr>
+    <a:masterClrMapping/>
+  </p:clrMapOvr>
+</p:sld>
+</file>
+
+<file path=ppt/slides/slide32.xml><?xml version="1.0" encoding="utf-8"?>
+<p:sld xmlns:a="http://schemas.openxmlformats.org/drawingml/2006/main" xmlns:p="http://schemas.openxmlformats.org/presentationml/2006/main" xmlns:r="http://schemas.openxmlformats.org/officeDocument/2006/relationships">
+  <p:cSld>
+    <p:spTree>
+      <p:nvGrpSpPr>
+        <p:cNvPr id="1" name=""/>
+        <p:cNvGrpSpPr/>
+        <p:nvPr/>
+      </p:nvGrpSpPr>
+      <p:grpSpPr/>
+      <p:sp>
+        <p:nvSpPr>
           <p:cNvPr id="2" name="TextBox 1"/>
           <p:cNvSpPr txBox="1"/>
           <p:nvPr/>
@@ -14997,7 +14319,7 @@
 </p:sld>
 </file>
 
-<file path=ppt/slides/slide29.xml><?xml version="1.0" encoding="utf-8"?>
+<file path=ppt/slides/slide33.xml><?xml version="1.0" encoding="utf-8"?>
 <p:sld xmlns:a="http://schemas.openxmlformats.org/drawingml/2006/main" xmlns:p="http://schemas.openxmlformats.org/presentationml/2006/main" xmlns:r="http://schemas.openxmlformats.org/officeDocument/2006/relationships">
   <p:cSld>
     <p:spTree>

--- a/10-Knowledge-Products/KP1-GEA/videos/module_1/en/decks/KP1_M1_1.4_Deck_v0.2.pptx
+++ b/10-Knowledge-Products/KP1-GEA/videos/module_1/en/decks/KP1_M1_1.4_Deck_v0.2.pptx
@@ -11706,7 +11706,7 @@
                 </a:solidFill>
                 <a:latin typeface="Arial"/>
               </a:rPr>
-              <a:t>KP1 · MODULE 1 · VIDEO 1.4</a:t>
+              <a:t>MODULE 1 · VIDEO 1.4</a:t>
             </a:r>
           </a:p>
         </p:txBody>
